--- a/templates/posts/october/05-10-2026-mon-ig-teachers-day-v2.pptx
+++ b/templates/posts/october/05-10-2026-mon-ig-teachers-day-v2.pptx
@@ -14,13 +14,6 @@
     <p:sldId id="262" r:id="rId14"/>
     <p:sldId id="263" r:id="rId15"/>
     <p:sldId id="264" r:id="rId16"/>
-    <p:sldId id="265" r:id="rId17"/>
-    <p:sldId id="266" r:id="rId18"/>
-    <p:sldId id="267" r:id="rId19"/>
-    <p:sldId id="268" r:id="rId20"/>
-    <p:sldId id="269" r:id="rId21"/>
-    <p:sldId id="270" r:id="rId22"/>
-    <p:sldId id="271" r:id="rId23"/>
   </p:sldIdLst>
   <p:sldSz cx="10287000" cy="12858750" type="screen4x3"/>
   <p:notesSz cx="6858000" cy="9144000"/>
@@ -542,496 +535,6 @@
 </p:notes>
 </file>
 
-<file path=ppt/notesSlides/notesSlide10.xml><?xml version="1.0" encoding="utf-8"?>
-<p:notes xmlns:a="http://schemas.openxmlformats.org/drawingml/2006/main" xmlns:p="http://schemas.openxmlformats.org/presentationml/2006/main" xmlns:r="http://schemas.openxmlformats.org/officeDocument/2006/relationships">
-  <p:cSld>
-    <p:spTree>
-      <p:nvGrpSpPr>
-        <p:cNvPr id="1" name=""/>
-        <p:cNvGrpSpPr/>
-        <p:nvPr/>
-      </p:nvGrpSpPr>
-      <p:grpSpPr>
-        <a:xfrm>
-          <a:off x="0" y="0"/>
-          <a:ext cx="0" cy="0"/>
-          <a:chOff x="0" y="0"/>
-          <a:chExt cx="0" cy="0"/>
-        </a:xfrm>
-      </p:grpSpPr>
-      <p:sp>
-        <p:nvSpPr>
-          <p:cNvPr id="2" name="Slide Image Placeholder 1"/>
-          <p:cNvSpPr>
-            <a:spLocks noGrp="1"/>
-          </p:cNvSpPr>
-          <p:nvPr>
-            <p:ph type="sldImg" idx="2"/>
-          </p:nvPr>
-        </p:nvSpPr>
-        <p:spPr/>
-      </p:sp>
-      <p:sp>
-        <p:nvSpPr>
-          <p:cNvPr id="3" name="Notes Placeholder 2"/>
-          <p:cNvSpPr>
-            <a:spLocks noGrp="1"/>
-          </p:cNvSpPr>
-          <p:nvPr>
-            <p:ph type="body" idx="3" sz="quarter"/>
-          </p:nvPr>
-        </p:nvSpPr>
-        <p:spPr/>
-        <p:txBody>
-          <a:bodyPr/>
-          <a:lstStyle/>
-          <a:p>
-            <a:r>
-              <a:t>Mentor card: Dora Tkalec, Advanced Programs Mentor. About line: draft from the team notes, confirm with Allison and Dora. No photo yet: flower arrangement. [ABOUT LINE NEEDED from Allison; the card shows name and role until then]</a:t>
-            </a:r>
-          </a:p>
-        </p:txBody>
-      </p:sp>
-      <p:sp>
-        <p:nvSpPr>
-          <p:cNvPr id="4" name="Slide Number Placeholder 3"/>
-          <p:cNvSpPr>
-            <a:spLocks noGrp="1"/>
-          </p:cNvSpPr>
-          <p:nvPr>
-            <p:ph type="sldNum" idx="5" sz="quarter"/>
-          </p:nvPr>
-        </p:nvSpPr>
-        <p:spPr/>
-      </p:sp>
-    </p:spTree>
-  </p:cSld>
-  <p:clrMapOvr>
-    <a:masterClrMapping/>
-  </p:clrMapOvr>
-</p:notes>
-</file>
-
-<file path=ppt/notesSlides/notesSlide11.xml><?xml version="1.0" encoding="utf-8"?>
-<p:notes xmlns:a="http://schemas.openxmlformats.org/drawingml/2006/main" xmlns:p="http://schemas.openxmlformats.org/presentationml/2006/main" xmlns:r="http://schemas.openxmlformats.org/officeDocument/2006/relationships">
-  <p:cSld>
-    <p:spTree>
-      <p:nvGrpSpPr>
-        <p:cNvPr id="1" name=""/>
-        <p:cNvGrpSpPr/>
-        <p:nvPr/>
-      </p:nvGrpSpPr>
-      <p:grpSpPr>
-        <a:xfrm>
-          <a:off x="0" y="0"/>
-          <a:ext cx="0" cy="0"/>
-          <a:chOff x="0" y="0"/>
-          <a:chExt cx="0" cy="0"/>
-        </a:xfrm>
-      </p:grpSpPr>
-      <p:sp>
-        <p:nvSpPr>
-          <p:cNvPr id="2" name="Slide Image Placeholder 1"/>
-          <p:cNvSpPr>
-            <a:spLocks noGrp="1"/>
-          </p:cNvSpPr>
-          <p:nvPr>
-            <p:ph type="sldImg" idx="2"/>
-          </p:nvPr>
-        </p:nvSpPr>
-        <p:spPr/>
-      </p:sp>
-      <p:sp>
-        <p:nvSpPr>
-          <p:cNvPr id="3" name="Notes Placeholder 2"/>
-          <p:cNvSpPr>
-            <a:spLocks noGrp="1"/>
-          </p:cNvSpPr>
-          <p:nvPr>
-            <p:ph type="body" idx="3" sz="quarter"/>
-          </p:nvPr>
-        </p:nvSpPr>
-        <p:spPr/>
-        <p:txBody>
-          <a:bodyPr/>
-          <a:lstStyle/>
-          <a:p>
-            <a:r>
-              <a:t>Mentor card: Gerald Ramirez, Advanced Programs Mentor. About line: draft from the team notes, confirm with Allison and Gerald. Advice line from the mentor bios, 30 Sep 2026: confirm with Gerald. Photo: assets/mentors-teachers-day/gerald-ramirez.jpg (written consent needed). </a:t>
-            </a:r>
-          </a:p>
-        </p:txBody>
-      </p:sp>
-      <p:sp>
-        <p:nvSpPr>
-          <p:cNvPr id="4" name="Slide Number Placeholder 3"/>
-          <p:cNvSpPr>
-            <a:spLocks noGrp="1"/>
-          </p:cNvSpPr>
-          <p:nvPr>
-            <p:ph type="sldNum" idx="5" sz="quarter"/>
-          </p:nvPr>
-        </p:nvSpPr>
-        <p:spPr/>
-      </p:sp>
-    </p:spTree>
-  </p:cSld>
-  <p:clrMapOvr>
-    <a:masterClrMapping/>
-  </p:clrMapOvr>
-</p:notes>
-</file>
-
-<file path=ppt/notesSlides/notesSlide12.xml><?xml version="1.0" encoding="utf-8"?>
-<p:notes xmlns:a="http://schemas.openxmlformats.org/drawingml/2006/main" xmlns:p="http://schemas.openxmlformats.org/presentationml/2006/main" xmlns:r="http://schemas.openxmlformats.org/officeDocument/2006/relationships">
-  <p:cSld>
-    <p:spTree>
-      <p:nvGrpSpPr>
-        <p:cNvPr id="1" name=""/>
-        <p:cNvGrpSpPr/>
-        <p:nvPr/>
-      </p:nvGrpSpPr>
-      <p:grpSpPr>
-        <a:xfrm>
-          <a:off x="0" y="0"/>
-          <a:ext cx="0" cy="0"/>
-          <a:chOff x="0" y="0"/>
-          <a:chExt cx="0" cy="0"/>
-        </a:xfrm>
-      </p:grpSpPr>
-      <p:sp>
-        <p:nvSpPr>
-          <p:cNvPr id="2" name="Slide Image Placeholder 1"/>
-          <p:cNvSpPr>
-            <a:spLocks noGrp="1"/>
-          </p:cNvSpPr>
-          <p:nvPr>
-            <p:ph type="sldImg" idx="2"/>
-          </p:nvPr>
-        </p:nvSpPr>
-        <p:spPr/>
-      </p:sp>
-      <p:sp>
-        <p:nvSpPr>
-          <p:cNvPr id="3" name="Notes Placeholder 2"/>
-          <p:cNvSpPr>
-            <a:spLocks noGrp="1"/>
-          </p:cNvSpPr>
-          <p:nvPr>
-            <p:ph type="body" idx="3" sz="quarter"/>
-          </p:nvPr>
-        </p:nvSpPr>
-        <p:spPr/>
-        <p:txBody>
-          <a:bodyPr/>
-          <a:lstStyle/>
-          <a:p>
-            <a:r>
-              <a:t>Mentor card: Elena Kalli, Advanced Programs Admin. About line: draft from the team notes, confirm with Allison and Elena. No photo yet: flower arrangement. [ABOUT LINE NEEDED from Allison; the card shows name and role until then]</a:t>
-            </a:r>
-          </a:p>
-        </p:txBody>
-      </p:sp>
-      <p:sp>
-        <p:nvSpPr>
-          <p:cNvPr id="4" name="Slide Number Placeholder 3"/>
-          <p:cNvSpPr>
-            <a:spLocks noGrp="1"/>
-          </p:cNvSpPr>
-          <p:nvPr>
-            <p:ph type="sldNum" idx="5" sz="quarter"/>
-          </p:nvPr>
-        </p:nvSpPr>
-        <p:spPr/>
-      </p:sp>
-    </p:spTree>
-  </p:cSld>
-  <p:clrMapOvr>
-    <a:masterClrMapping/>
-  </p:clrMapOvr>
-</p:notes>
-</file>
-
-<file path=ppt/notesSlides/notesSlide13.xml><?xml version="1.0" encoding="utf-8"?>
-<p:notes xmlns:a="http://schemas.openxmlformats.org/drawingml/2006/main" xmlns:p="http://schemas.openxmlformats.org/presentationml/2006/main" xmlns:r="http://schemas.openxmlformats.org/officeDocument/2006/relationships">
-  <p:cSld>
-    <p:spTree>
-      <p:nvGrpSpPr>
-        <p:cNvPr id="1" name=""/>
-        <p:cNvGrpSpPr/>
-        <p:nvPr/>
-      </p:nvGrpSpPr>
-      <p:grpSpPr>
-        <a:xfrm>
-          <a:off x="0" y="0"/>
-          <a:ext cx="0" cy="0"/>
-          <a:chOff x="0" y="0"/>
-          <a:chExt cx="0" cy="0"/>
-        </a:xfrm>
-      </p:grpSpPr>
-      <p:sp>
-        <p:nvSpPr>
-          <p:cNvPr id="2" name="Slide Image Placeholder 1"/>
-          <p:cNvSpPr>
-            <a:spLocks noGrp="1"/>
-          </p:cNvSpPr>
-          <p:nvPr>
-            <p:ph type="sldImg" idx="2"/>
-          </p:nvPr>
-        </p:nvSpPr>
-        <p:spPr/>
-      </p:sp>
-      <p:sp>
-        <p:nvSpPr>
-          <p:cNvPr id="3" name="Notes Placeholder 2"/>
-          <p:cNvSpPr>
-            <a:spLocks noGrp="1"/>
-          </p:cNvSpPr>
-          <p:nvPr>
-            <p:ph type="body" idx="3" sz="quarter"/>
-          </p:nvPr>
-        </p:nvSpPr>
-        <p:spPr/>
-        <p:txBody>
-          <a:bodyPr/>
-          <a:lstStyle/>
-          <a:p>
-            <a:r>
-              <a:t>Mentor card: Ib Borup Pederson, Advanced Programs Mentor. About line: draft from the team notes, confirm with Allison and Ib. No photo yet: flower arrangement. [ABOUT LINE NEEDED from Allison; the card shows name and role until then]</a:t>
-            </a:r>
-          </a:p>
-        </p:txBody>
-      </p:sp>
-      <p:sp>
-        <p:nvSpPr>
-          <p:cNvPr id="4" name="Slide Number Placeholder 3"/>
-          <p:cNvSpPr>
-            <a:spLocks noGrp="1"/>
-          </p:cNvSpPr>
-          <p:nvPr>
-            <p:ph type="sldNum" idx="5" sz="quarter"/>
-          </p:nvPr>
-        </p:nvSpPr>
-        <p:spPr/>
-      </p:sp>
-    </p:spTree>
-  </p:cSld>
-  <p:clrMapOvr>
-    <a:masterClrMapping/>
-  </p:clrMapOvr>
-</p:notes>
-</file>
-
-<file path=ppt/notesSlides/notesSlide14.xml><?xml version="1.0" encoding="utf-8"?>
-<p:notes xmlns:a="http://schemas.openxmlformats.org/drawingml/2006/main" xmlns:p="http://schemas.openxmlformats.org/presentationml/2006/main" xmlns:r="http://schemas.openxmlformats.org/officeDocument/2006/relationships">
-  <p:cSld>
-    <p:spTree>
-      <p:nvGrpSpPr>
-        <p:cNvPr id="1" name=""/>
-        <p:cNvGrpSpPr/>
-        <p:nvPr/>
-      </p:nvGrpSpPr>
-      <p:grpSpPr>
-        <a:xfrm>
-          <a:off x="0" y="0"/>
-          <a:ext cx="0" cy="0"/>
-          <a:chOff x="0" y="0"/>
-          <a:chExt cx="0" cy="0"/>
-        </a:xfrm>
-      </p:grpSpPr>
-      <p:sp>
-        <p:nvSpPr>
-          <p:cNvPr id="2" name="Slide Image Placeholder 1"/>
-          <p:cNvSpPr>
-            <a:spLocks noGrp="1"/>
-          </p:cNvSpPr>
-          <p:nvPr>
-            <p:ph type="sldImg" idx="2"/>
-          </p:nvPr>
-        </p:nvSpPr>
-        <p:spPr/>
-      </p:sp>
-      <p:sp>
-        <p:nvSpPr>
-          <p:cNvPr id="3" name="Notes Placeholder 2"/>
-          <p:cNvSpPr>
-            <a:spLocks noGrp="1"/>
-          </p:cNvSpPr>
-          <p:nvPr>
-            <p:ph type="body" idx="3" sz="quarter"/>
-          </p:nvPr>
-        </p:nvSpPr>
-        <p:spPr/>
-        <p:txBody>
-          <a:bodyPr/>
-          <a:lstStyle/>
-          <a:p>
-            <a:r>
-              <a:t>Mentor card: Nick Padwick, Advanced Programs Mentor. About line: draft from the team notes, confirm with Allison and Nick. Advice line from the mentor bios, 30 Sep 2026: confirm with Nick. Photo: assets/mentors-teachers-day/Nick.png (written consent needed). </a:t>
-            </a:r>
-          </a:p>
-        </p:txBody>
-      </p:sp>
-      <p:sp>
-        <p:nvSpPr>
-          <p:cNvPr id="4" name="Slide Number Placeholder 3"/>
-          <p:cNvSpPr>
-            <a:spLocks noGrp="1"/>
-          </p:cNvSpPr>
-          <p:nvPr>
-            <p:ph type="sldNum" idx="5" sz="quarter"/>
-          </p:nvPr>
-        </p:nvSpPr>
-        <p:spPr/>
-      </p:sp>
-    </p:spTree>
-  </p:cSld>
-  <p:clrMapOvr>
-    <a:masterClrMapping/>
-  </p:clrMapOvr>
-</p:notes>
-</file>
-
-<file path=ppt/notesSlides/notesSlide15.xml><?xml version="1.0" encoding="utf-8"?>
-<p:notes xmlns:a="http://schemas.openxmlformats.org/drawingml/2006/main" xmlns:p="http://schemas.openxmlformats.org/presentationml/2006/main" xmlns:r="http://schemas.openxmlformats.org/officeDocument/2006/relationships">
-  <p:cSld>
-    <p:spTree>
-      <p:nvGrpSpPr>
-        <p:cNvPr id="1" name=""/>
-        <p:cNvGrpSpPr/>
-        <p:nvPr/>
-      </p:nvGrpSpPr>
-      <p:grpSpPr>
-        <a:xfrm>
-          <a:off x="0" y="0"/>
-          <a:ext cx="0" cy="0"/>
-          <a:chOff x="0" y="0"/>
-          <a:chExt cx="0" cy="0"/>
-        </a:xfrm>
-      </p:grpSpPr>
-      <p:sp>
-        <p:nvSpPr>
-          <p:cNvPr id="2" name="Slide Image Placeholder 1"/>
-          <p:cNvSpPr>
-            <a:spLocks noGrp="1"/>
-          </p:cNvSpPr>
-          <p:nvPr>
-            <p:ph type="sldImg" idx="2"/>
-          </p:nvPr>
-        </p:nvSpPr>
-        <p:spPr/>
-      </p:sp>
-      <p:sp>
-        <p:nvSpPr>
-          <p:cNvPr id="3" name="Notes Placeholder 2"/>
-          <p:cNvSpPr>
-            <a:spLocks noGrp="1"/>
-          </p:cNvSpPr>
-          <p:nvPr>
-            <p:ph type="body" idx="3" sz="quarter"/>
-          </p:nvPr>
-        </p:nvSpPr>
-        <p:spPr/>
-        <p:txBody>
-          <a:bodyPr/>
-          <a:lstStyle/>
-          <a:p>
-            <a:r>
-              <a:t>Mentor card: Delvin Solkinson, Permaculture Lead Teacher. About line: draft from the team notes, confirm with Allison and Delvin. No photo yet: flower arrangement. [ABOUT LINE NEEDED from Allison; the card shows name and role until then]</a:t>
-            </a:r>
-          </a:p>
-        </p:txBody>
-      </p:sp>
-      <p:sp>
-        <p:nvSpPr>
-          <p:cNvPr id="4" name="Slide Number Placeholder 3"/>
-          <p:cNvSpPr>
-            <a:spLocks noGrp="1"/>
-          </p:cNvSpPr>
-          <p:nvPr>
-            <p:ph type="sldNum" idx="5" sz="quarter"/>
-          </p:nvPr>
-        </p:nvSpPr>
-        <p:spPr/>
-      </p:sp>
-    </p:spTree>
-  </p:cSld>
-  <p:clrMapOvr>
-    <a:masterClrMapping/>
-  </p:clrMapOvr>
-</p:notes>
-</file>
-
-<file path=ppt/notesSlides/notesSlide16.xml><?xml version="1.0" encoding="utf-8"?>
-<p:notes xmlns:a="http://schemas.openxmlformats.org/drawingml/2006/main" xmlns:p="http://schemas.openxmlformats.org/presentationml/2006/main" xmlns:r="http://schemas.openxmlformats.org/officeDocument/2006/relationships">
-  <p:cSld>
-    <p:spTree>
-      <p:nvGrpSpPr>
-        <p:cNvPr id="1" name=""/>
-        <p:cNvGrpSpPr/>
-        <p:nvPr/>
-      </p:nvGrpSpPr>
-      <p:grpSpPr>
-        <a:xfrm>
-          <a:off x="0" y="0"/>
-          <a:ext cx="0" cy="0"/>
-          <a:chOff x="0" y="0"/>
-          <a:chExt cx="0" cy="0"/>
-        </a:xfrm>
-      </p:grpSpPr>
-      <p:sp>
-        <p:nvSpPr>
-          <p:cNvPr id="2" name="Slide Image Placeholder 1"/>
-          <p:cNvSpPr>
-            <a:spLocks noGrp="1"/>
-          </p:cNvSpPr>
-          <p:nvPr>
-            <p:ph type="sldImg" idx="2"/>
-          </p:nvPr>
-        </p:nvSpPr>
-        <p:spPr/>
-      </p:sp>
-      <p:sp>
-        <p:nvSpPr>
-          <p:cNvPr id="3" name="Notes Placeholder 2"/>
-          <p:cNvSpPr>
-            <a:spLocks noGrp="1"/>
-          </p:cNvSpPr>
-          <p:nvPr>
-            <p:ph type="body" idx="3" sz="quarter"/>
-          </p:nvPr>
-        </p:nvSpPr>
-        <p:spPr/>
-        <p:txBody>
-          <a:bodyPr/>
-          <a:lstStyle/>
-          <a:p>
-            <a:r>
-              <a:t>Closing: every mentor on the roster thanked by name.</a:t>
-            </a:r>
-          </a:p>
-        </p:txBody>
-      </p:sp>
-      <p:sp>
-        <p:nvSpPr>
-          <p:cNvPr id="4" name="Slide Number Placeholder 3"/>
-          <p:cNvSpPr>
-            <a:spLocks noGrp="1"/>
-          </p:cNvSpPr>
-          <p:nvPr>
-            <p:ph type="sldNum" idx="5" sz="quarter"/>
-          </p:nvPr>
-        </p:nvSpPr>
-        <p:spPr/>
-      </p:sp>
-    </p:spTree>
-  </p:cSld>
-  <p:clrMapOvr>
-    <a:masterClrMapping/>
-  </p:clrMapOvr>
-</p:notes>
-</file>
-
 <file path=ppt/notesSlides/notesSlide2.xml><?xml version="1.0" encoding="utf-8"?>
 <p:notes xmlns:a="http://schemas.openxmlformats.org/drawingml/2006/main" xmlns:p="http://schemas.openxmlformats.org/presentationml/2006/main" xmlns:r="http://schemas.openxmlformats.org/officeDocument/2006/relationships">
   <p:cSld>
@@ -1077,7 +580,7 @@
           <a:lstStyle/>
           <a:p>
             <a:r>
-              <a:t>Mentor card: Tommy Tepper, Director of Education &amp; Mentor. About line: draft from the team notes, confirm with Allison and Tommy. No photo yet: flower arrangement. [ABOUT LINE NEEDED from Allison; the card shows name and role until then]</a:t>
+              <a:t>Mentors: Tommy Tepper, Loida Vasquez. About and advice lines: drafts from the team notes, confirm with each mentor (05-10-2026-mon-ig-teachers-day-mentors.md). Photo boxes marked PHOTO NEEDED: drop the mentor's photo in (written consent).</a:t>
             </a:r>
           </a:p>
         </p:txBody>
@@ -1147,7 +650,7 @@
           <a:lstStyle/>
           <a:p>
             <a:r>
-              <a:t>Mentor card: Loida Vasquez, Advanced Programs Lead &amp; Mentor. About line: draft from the team notes, confirm with Allison and Loida. Photo: assets/photo/loida-teaching-3.jpg (written consent needed).  [ABOUT LINE NEEDED from Allison; the card shows name and role until then]</a:t>
+              <a:t>Mentors: Carla Portugal, Wesley Sanders. About and advice lines: drafts from the team notes, confirm with each mentor (05-10-2026-mon-ig-teachers-day-mentors.md). Photo boxes marked PHOTO NEEDED: drop the mentor's photo in (written consent).</a:t>
             </a:r>
           </a:p>
         </p:txBody>
@@ -1217,7 +720,7 @@
           <a:lstStyle/>
           <a:p>
             <a:r>
-              <a:t>Mentor card: Dr. Carla Portugal, Science Lead &amp; Mentor. About line: draft from the team notes, confirm with Allison and Carla. Advice line from the mentor bios, 30 Sep 2026: confirm with Carla. Photo: assets/mentors-teachers-day/carla-portugal.jpg (written consent needed). </a:t>
+              <a:t>Mentors: Casey Williams, Brian Daubenspeck. About and advice lines: drafts from the team notes, confirm with each mentor (05-10-2026-mon-ig-teachers-day-mentors.md). Photo boxes marked PHOTO NEEDED: drop the mentor's photo in (written consent).</a:t>
             </a:r>
           </a:p>
         </p:txBody>
@@ -1287,7 +790,7 @@
           <a:lstStyle/>
           <a:p>
             <a:r>
-              <a:t>Mentor card: Wesley Sanders, Advanced Programs Mentor. About line: draft from the team notes, confirm with Allison and Wesley. Advice line from the mentor bios, 30 Sep 2026: confirm with Wesley. Photo: assets/mentors-teachers-day/wes-sander.jpg (written consent needed). </a:t>
+              <a:t>Mentors: Isadora Schmidt, Aysen Ustunay. About and advice lines: drafts from the team notes, confirm with each mentor (05-10-2026-mon-ig-teachers-day-mentors.md). Photo boxes marked PHOTO NEEDED: drop the mentor's photo in (written consent).</a:t>
             </a:r>
           </a:p>
         </p:txBody>
@@ -1357,7 +860,7 @@
           <a:lstStyle/>
           <a:p>
             <a:r>
-              <a:t>Mentor card: Casey Williams, Advanced Programs Mentor. About line: draft from the team notes, confirm with Allison and Casey. No photo yet: flower arrangement.</a:t>
+              <a:t>Mentors: Dora Tkalec, Gerald Ramirez. About and advice lines: drafts from the team notes, confirm with each mentor (05-10-2026-mon-ig-teachers-day-mentors.md). Photo boxes marked PHOTO NEEDED: drop the mentor's photo in (written consent).</a:t>
             </a:r>
           </a:p>
         </p:txBody>
@@ -1427,7 +930,7 @@
           <a:lstStyle/>
           <a:p>
             <a:r>
-              <a:t>Mentor card: Brian Daubenspeck, Advanced Programs Mentor. About line: draft from the team notes, confirm with Allison and Brian. No photo yet: flower arrangement.</a:t>
+              <a:t>Mentors: Elena Kalli, Ib Borup Pederson. About and advice lines: drafts from the team notes, confirm with each mentor (05-10-2026-mon-ig-teachers-day-mentors.md). Photo boxes marked PHOTO NEEDED: drop the mentor's photo in (written consent).</a:t>
             </a:r>
           </a:p>
         </p:txBody>
@@ -1497,7 +1000,7 @@
           <a:lstStyle/>
           <a:p>
             <a:r>
-              <a:t>Mentor card: Isadora Schmidt, Advanced Programs Mentor. About line: draft from the team notes, confirm with Allison and Isadora. No photo yet: flower arrangement.</a:t>
+              <a:t>Mentors: Nick Padwick, Delvin Solkinson. About and advice lines: drafts from the team notes, confirm with each mentor (05-10-2026-mon-ig-teachers-day-mentors.md). Photo boxes marked PHOTO NEEDED: drop the mentor's photo in (written consent).</a:t>
             </a:r>
           </a:p>
         </p:txBody>
@@ -1567,7 +1070,7 @@
           <a:lstStyle/>
           <a:p>
             <a:r>
-              <a:t>Mentor card: Aysen Ustunay, Advanced Programs Mentor. About line: draft from the team notes, confirm with Allison and Aysen. No photo yet: flower arrangement.</a:t>
+              <a:t>Closing: every mentor on the roster thanked by name.</a:t>
             </a:r>
           </a:p>
         </p:txBody>
@@ -4850,1732 +4353,6 @@
 </p:sld>
 </file>
 
-<file path=ppt/slides/slide10.xml><?xml version="1.0" encoding="utf-8"?>
-<p:sld xmlns:a="http://schemas.openxmlformats.org/drawingml/2006/main" xmlns:p="http://schemas.openxmlformats.org/presentationml/2006/main" xmlns:r="http://schemas.openxmlformats.org/officeDocument/2006/relationships">
-  <p:cSld>
-    <p:bg>
-      <p:bgPr>
-        <a:solidFill>
-          <a:srgbClr val="F3F1EA"/>
-        </a:solidFill>
-        <a:effectLst/>
-      </p:bgPr>
-    </p:bg>
-    <p:spTree>
-      <p:nvGrpSpPr>
-        <p:cNvPr id="1" name=""/>
-        <p:cNvGrpSpPr/>
-        <p:nvPr/>
-      </p:nvGrpSpPr>
-      <p:grpSpPr/>
-      <p:sp>
-        <p:nvSpPr>
-          <p:cNvPr id="2" name="Rectangle 1"/>
-          <p:cNvSpPr/>
-          <p:nvPr/>
-        </p:nvSpPr>
-        <p:spPr>
-          <a:xfrm>
-            <a:off x="762000" y="762000"/>
-            <a:ext cx="8763000" cy="7810500"/>
-          </a:xfrm>
-          <a:prstGeom prst="rect">
-            <a:avLst/>
-          </a:prstGeom>
-          <a:solidFill>
-            <a:srgbClr val="E4E6DC"/>
-          </a:solidFill>
-          <a:ln>
-            <a:noFill/>
-          </a:ln>
-          <a:effectLst/>
-        </p:spPr>
-        <p:style>
-          <a:lnRef idx="1">
-            <a:schemeClr val="accent1"/>
-          </a:lnRef>
-          <a:fillRef idx="3">
-            <a:schemeClr val="accent1"/>
-          </a:fillRef>
-          <a:effectRef idx="2">
-            <a:schemeClr val="accent1"/>
-          </a:effectRef>
-          <a:fontRef idx="minor">
-            <a:schemeClr val="lt1"/>
-          </a:fontRef>
-        </p:style>
-        <p:txBody>
-          <a:bodyPr rtlCol="0" anchor="ctr"/>
-          <a:lstStyle/>
-          <a:p>
-            <a:pPr algn="ctr"/>
-          </a:p>
-        </p:txBody>
-      </p:sp>
-      <p:pic>
-        <p:nvPicPr>
-          <p:cNvPr id="3" name="Picture 2" descr="td-tithonia-flower-1.png"/>
-          <p:cNvPicPr>
-            <a:picLocks noChangeAspect="1"/>
-          </p:cNvPicPr>
-          <p:nvPr/>
-        </p:nvPicPr>
-        <p:blipFill>
-          <a:blip r:embed="rId3"/>
-          <a:stretch>
-            <a:fillRect/>
-          </a:stretch>
-        </p:blipFill>
-        <p:spPr>
-          <a:xfrm>
-            <a:off x="1111329" y="1143000"/>
-            <a:ext cx="3682841" cy="7048500"/>
-          </a:xfrm>
-          <a:prstGeom prst="rect">
-            <a:avLst/>
-          </a:prstGeom>
-        </p:spPr>
-      </p:pic>
-      <p:pic>
-        <p:nvPicPr>
-          <p:cNvPr id="4" name="Picture 3" descr="td-dried-flowers-2-1.png"/>
-          <p:cNvPicPr>
-            <a:picLocks noChangeAspect="1"/>
-          </p:cNvPicPr>
-          <p:nvPr/>
-        </p:nvPicPr>
-        <p:blipFill>
-          <a:blip r:embed="rId4"/>
-          <a:stretch>
-            <a:fillRect/>
-          </a:stretch>
-        </p:blipFill>
-        <p:spPr>
-          <a:xfrm>
-            <a:off x="5334000" y="1653690"/>
-            <a:ext cx="4000500" cy="6027118"/>
-          </a:xfrm>
-          <a:prstGeom prst="rect">
-            <a:avLst/>
-          </a:prstGeom>
-        </p:spPr>
-      </p:pic>
-      <p:sp>
-        <p:nvSpPr>
-          <p:cNvPr id="5" name="TextBox 4"/>
-          <p:cNvSpPr txBox="1"/>
-          <p:nvPr/>
-        </p:nvSpPr>
-        <p:spPr>
-          <a:xfrm>
-            <a:off x="762000" y="8896350"/>
-            <a:ext cx="8763000" cy="838181"/>
-          </a:xfrm>
-          <a:prstGeom prst="rect">
-            <a:avLst/>
-          </a:prstGeom>
-          <a:noFill/>
-        </p:spPr>
-        <p:txBody>
-          <a:bodyPr wrap="square" lIns="0" rIns="0" tIns="0" bIns="0" anchor="t">
-            <a:spAutoFit/>
-          </a:bodyPr>
-          <a:lstStyle/>
-          <a:p>
-            <a:pPr algn="l">
-              <a:lnSpc>
-                <a:spcPct val="100000"/>
-              </a:lnSpc>
-            </a:pPr>
-            <a:r>
-              <a:rPr sz="5000" b="1" i="0">
-                <a:solidFill>
-                  <a:srgbClr val="31662F"/>
-                </a:solidFill>
-                <a:latin typeface="Montserrat"/>
-              </a:rPr>
-              <a:t>Dora Tkalec</a:t>
-            </a:r>
-          </a:p>
-        </p:txBody>
-      </p:sp>
-      <p:sp>
-        <p:nvSpPr>
-          <p:cNvPr id="6" name="TextBox 5"/>
-          <p:cNvSpPr txBox="1"/>
-          <p:nvPr/>
-        </p:nvSpPr>
-        <p:spPr>
-          <a:xfrm>
-            <a:off x="762000" y="9696431"/>
-            <a:ext cx="8763000" cy="471173"/>
-          </a:xfrm>
-          <a:prstGeom prst="rect">
-            <a:avLst/>
-          </a:prstGeom>
-          <a:noFill/>
-        </p:spPr>
-        <p:txBody>
-          <a:bodyPr wrap="square" lIns="0" rIns="0" tIns="0" bIns="0" anchor="t">
-            <a:spAutoFit/>
-          </a:bodyPr>
-          <a:lstStyle/>
-          <a:p>
-            <a:pPr algn="l">
-              <a:lnSpc>
-                <a:spcPct val="115000"/>
-              </a:lnSpc>
-            </a:pPr>
-            <a:r>
-              <a:rPr sz="2200" b="0" i="0">
-                <a:solidFill>
-                  <a:srgbClr val="1A1A1A"/>
-                </a:solidFill>
-                <a:latin typeface="Source Sans 3"/>
-              </a:rPr>
-              <a:t>Advanced Programs Mentor</a:t>
-            </a:r>
-          </a:p>
-        </p:txBody>
-      </p:sp>
-      <p:sp>
-        <p:nvSpPr>
-          <p:cNvPr id="7" name="TextBox 6"/>
-          <p:cNvSpPr txBox="1"/>
-          <p:nvPr/>
-        </p:nvSpPr>
-        <p:spPr>
-          <a:xfrm>
-            <a:off x="6667500" y="12192000"/>
-            <a:ext cx="2857500" cy="285750"/>
-          </a:xfrm>
-          <a:prstGeom prst="rect">
-            <a:avLst/>
-          </a:prstGeom>
-          <a:noFill/>
-        </p:spPr>
-        <p:txBody>
-          <a:bodyPr wrap="square" lIns="0" rIns="0" tIns="0" bIns="0" anchor="t">
-            <a:spAutoFit/>
-          </a:bodyPr>
-          <a:lstStyle/>
-          <a:p>
-            <a:pPr algn="r">
-              <a:lnSpc>
-                <a:spcPct val="120000"/>
-              </a:lnSpc>
-            </a:pPr>
-            <a:r>
-              <a:rPr sz="1800" b="1" i="0">
-                <a:solidFill>
-                  <a:srgbClr val="31662F"/>
-                </a:solidFill>
-                <a:latin typeface="Montserrat"/>
-              </a:rPr>
-              <a:t>soilfoodweb.com</a:t>
-            </a:r>
-          </a:p>
-        </p:txBody>
-      </p:sp>
-    </p:spTree>
-  </p:cSld>
-  <p:clrMapOvr>
-    <a:masterClrMapping/>
-  </p:clrMapOvr>
-</p:sld>
-</file>
-
-<file path=ppt/slides/slide11.xml><?xml version="1.0" encoding="utf-8"?>
-<p:sld xmlns:a="http://schemas.openxmlformats.org/drawingml/2006/main" xmlns:p="http://schemas.openxmlformats.org/presentationml/2006/main" xmlns:r="http://schemas.openxmlformats.org/officeDocument/2006/relationships">
-  <p:cSld>
-    <p:bg>
-      <p:bgPr>
-        <a:solidFill>
-          <a:srgbClr val="F3F1EA"/>
-        </a:solidFill>
-        <a:effectLst/>
-      </p:bgPr>
-    </p:bg>
-    <p:spTree>
-      <p:nvGrpSpPr>
-        <p:cNvPr id="1" name=""/>
-        <p:cNvGrpSpPr/>
-        <p:nvPr/>
-      </p:nvGrpSpPr>
-      <p:grpSpPr/>
-      <p:pic>
-        <p:nvPicPr>
-          <p:cNvPr id="2" name="Picture 1" descr="996845873164579182.jpg"/>
-          <p:cNvPicPr>
-            <a:picLocks noChangeAspect="1"/>
-          </p:cNvPicPr>
-          <p:nvPr/>
-        </p:nvPicPr>
-        <p:blipFill>
-          <a:blip r:embed="rId3"/>
-          <a:stretch>
-            <a:fillRect/>
-          </a:stretch>
-        </p:blipFill>
-        <p:spPr>
-          <a:xfrm>
-            <a:off x="762000" y="762000"/>
-            <a:ext cx="8763000" cy="5334000"/>
-          </a:xfrm>
-          <a:prstGeom prst="rect">
-            <a:avLst/>
-          </a:prstGeom>
-        </p:spPr>
-      </p:pic>
-      <p:pic>
-        <p:nvPicPr>
-          <p:cNvPr id="3" name="Picture 2" descr="td-dried-flowers-1-1.png"/>
-          <p:cNvPicPr>
-            <a:picLocks noChangeAspect="1"/>
-          </p:cNvPicPr>
-          <p:nvPr/>
-        </p:nvPicPr>
-        <p:blipFill>
-          <a:blip r:embed="rId4"/>
-          <a:stretch>
-            <a:fillRect/>
-          </a:stretch>
-        </p:blipFill>
-        <p:spPr>
-          <a:xfrm>
-            <a:off x="8096250" y="5003697"/>
-            <a:ext cx="1619250" cy="2089354"/>
-          </a:xfrm>
-          <a:prstGeom prst="rect">
-            <a:avLst/>
-          </a:prstGeom>
-        </p:spPr>
-      </p:pic>
-      <p:sp>
-        <p:nvSpPr>
-          <p:cNvPr id="4" name="TextBox 3"/>
-          <p:cNvSpPr txBox="1"/>
-          <p:nvPr/>
-        </p:nvSpPr>
-        <p:spPr>
-          <a:xfrm>
-            <a:off x="762000" y="6419850"/>
-            <a:ext cx="8763000" cy="838181"/>
-          </a:xfrm>
-          <a:prstGeom prst="rect">
-            <a:avLst/>
-          </a:prstGeom>
-          <a:noFill/>
-        </p:spPr>
-        <p:txBody>
-          <a:bodyPr wrap="square" lIns="0" rIns="0" tIns="0" bIns="0" anchor="t">
-            <a:spAutoFit/>
-          </a:bodyPr>
-          <a:lstStyle/>
-          <a:p>
-            <a:pPr algn="l">
-              <a:lnSpc>
-                <a:spcPct val="100000"/>
-              </a:lnSpc>
-            </a:pPr>
-            <a:r>
-              <a:rPr sz="5000" b="1" i="0">
-                <a:solidFill>
-                  <a:srgbClr val="31662F"/>
-                </a:solidFill>
-                <a:latin typeface="Montserrat"/>
-              </a:rPr>
-              <a:t>Gerald Ramirez</a:t>
-            </a:r>
-          </a:p>
-        </p:txBody>
-      </p:sp>
-      <p:sp>
-        <p:nvSpPr>
-          <p:cNvPr id="5" name="TextBox 4"/>
-          <p:cNvSpPr txBox="1"/>
-          <p:nvPr/>
-        </p:nvSpPr>
-        <p:spPr>
-          <a:xfrm>
-            <a:off x="762000" y="7219931"/>
-            <a:ext cx="8763000" cy="471173"/>
-          </a:xfrm>
-          <a:prstGeom prst="rect">
-            <a:avLst/>
-          </a:prstGeom>
-          <a:noFill/>
-        </p:spPr>
-        <p:txBody>
-          <a:bodyPr wrap="square" lIns="0" rIns="0" tIns="0" bIns="0" anchor="t">
-            <a:spAutoFit/>
-          </a:bodyPr>
-          <a:lstStyle/>
-          <a:p>
-            <a:pPr algn="l">
-              <a:lnSpc>
-                <a:spcPct val="115000"/>
-              </a:lnSpc>
-            </a:pPr>
-            <a:r>
-              <a:rPr sz="2200" b="0" i="0">
-                <a:solidFill>
-                  <a:srgbClr val="1A1A1A"/>
-                </a:solidFill>
-                <a:latin typeface="Source Sans 3"/>
-              </a:rPr>
-              <a:t>Advanced Programs Mentor</a:t>
-            </a:r>
-          </a:p>
-        </p:txBody>
-      </p:sp>
-      <p:sp>
-        <p:nvSpPr>
-          <p:cNvPr id="6" name="TextBox 5"/>
-          <p:cNvSpPr txBox="1"/>
-          <p:nvPr/>
-        </p:nvSpPr>
-        <p:spPr>
-          <a:xfrm>
-            <a:off x="762000" y="7843504"/>
-            <a:ext cx="8763000" cy="2043216"/>
-          </a:xfrm>
-          <a:prstGeom prst="rect">
-            <a:avLst/>
-          </a:prstGeom>
-          <a:noFill/>
-        </p:spPr>
-        <p:txBody>
-          <a:bodyPr wrap="square" lIns="0" rIns="0" tIns="0" bIns="0" anchor="t">
-            <a:spAutoFit/>
-          </a:bodyPr>
-          <a:lstStyle/>
-          <a:p>
-            <a:pPr algn="l">
-              <a:lnSpc>
-                <a:spcPct val="115000"/>
-              </a:lnSpc>
-            </a:pPr>
-            <a:r>
-              <a:rPr sz="3800" b="0" i="1">
-                <a:solidFill>
-                  <a:srgbClr val="1A1A1A"/>
-                </a:solidFill>
-                <a:latin typeface="EB Garamond"/>
-              </a:rPr>
-              <a:t>“Extracts pull organisms off the compost into solution, so you can apply biology across a whole field.”</a:t>
-            </a:r>
-          </a:p>
-        </p:txBody>
-      </p:sp>
-      <p:sp>
-        <p:nvSpPr>
-          <p:cNvPr id="7" name="TextBox 6"/>
-          <p:cNvSpPr txBox="1"/>
-          <p:nvPr/>
-        </p:nvSpPr>
-        <p:spPr>
-          <a:xfrm>
-            <a:off x="762000" y="9981970"/>
-            <a:ext cx="8763000" cy="1428068"/>
-          </a:xfrm>
-          <a:prstGeom prst="rect">
-            <a:avLst/>
-          </a:prstGeom>
-          <a:noFill/>
-        </p:spPr>
-        <p:txBody>
-          <a:bodyPr wrap="square" lIns="0" rIns="0" tIns="0" bIns="0" anchor="t">
-            <a:spAutoFit/>
-          </a:bodyPr>
-          <a:lstStyle/>
-          <a:p>
-            <a:pPr algn="l">
-              <a:lnSpc>
-                <a:spcPct val="115000"/>
-              </a:lnSpc>
-            </a:pPr>
-            <a:r>
-              <a:rPr sz="2600" b="0" i="0">
-                <a:solidFill>
-                  <a:srgbClr val="31662F"/>
-                </a:solidFill>
-                <a:latin typeface="Source Sans 3"/>
-              </a:rPr>
-              <a:t>An agronomist from the University of Costa Rica, who went looking for Dr. Elaine's teaching. Now he teaches it, from compost extracts to teas.</a:t>
-            </a:r>
-          </a:p>
-        </p:txBody>
-      </p:sp>
-      <p:sp>
-        <p:nvSpPr>
-          <p:cNvPr id="8" name="TextBox 7"/>
-          <p:cNvSpPr txBox="1"/>
-          <p:nvPr/>
-        </p:nvSpPr>
-        <p:spPr>
-          <a:xfrm>
-            <a:off x="6667500" y="12192000"/>
-            <a:ext cx="2857500" cy="285750"/>
-          </a:xfrm>
-          <a:prstGeom prst="rect">
-            <a:avLst/>
-          </a:prstGeom>
-          <a:noFill/>
-        </p:spPr>
-        <p:txBody>
-          <a:bodyPr wrap="square" lIns="0" rIns="0" tIns="0" bIns="0" anchor="t">
-            <a:spAutoFit/>
-          </a:bodyPr>
-          <a:lstStyle/>
-          <a:p>
-            <a:pPr algn="r">
-              <a:lnSpc>
-                <a:spcPct val="120000"/>
-              </a:lnSpc>
-            </a:pPr>
-            <a:r>
-              <a:rPr sz="1800" b="1" i="0">
-                <a:solidFill>
-                  <a:srgbClr val="31662F"/>
-                </a:solidFill>
-                <a:latin typeface="Montserrat"/>
-              </a:rPr>
-              <a:t>soilfoodweb.com</a:t>
-            </a:r>
-          </a:p>
-        </p:txBody>
-      </p:sp>
-    </p:spTree>
-  </p:cSld>
-  <p:clrMapOvr>
-    <a:masterClrMapping/>
-  </p:clrMapOvr>
-</p:sld>
-</file>
-
-<file path=ppt/slides/slide12.xml><?xml version="1.0" encoding="utf-8"?>
-<p:sld xmlns:a="http://schemas.openxmlformats.org/drawingml/2006/main" xmlns:p="http://schemas.openxmlformats.org/presentationml/2006/main" xmlns:r="http://schemas.openxmlformats.org/officeDocument/2006/relationships">
-  <p:cSld>
-    <p:bg>
-      <p:bgPr>
-        <a:solidFill>
-          <a:srgbClr val="F3F1EA"/>
-        </a:solidFill>
-        <a:effectLst/>
-      </p:bgPr>
-    </p:bg>
-    <p:spTree>
-      <p:nvGrpSpPr>
-        <p:cNvPr id="1" name=""/>
-        <p:cNvGrpSpPr/>
-        <p:nvPr/>
-      </p:nvGrpSpPr>
-      <p:grpSpPr/>
-      <p:sp>
-        <p:nvSpPr>
-          <p:cNvPr id="2" name="Rectangle 1"/>
-          <p:cNvSpPr/>
-          <p:nvPr/>
-        </p:nvSpPr>
-        <p:spPr>
-          <a:xfrm>
-            <a:off x="762000" y="762000"/>
-            <a:ext cx="8763000" cy="7810500"/>
-          </a:xfrm>
-          <a:prstGeom prst="rect">
-            <a:avLst/>
-          </a:prstGeom>
-          <a:solidFill>
-            <a:srgbClr val="E4E6DC"/>
-          </a:solidFill>
-          <a:ln>
-            <a:noFill/>
-          </a:ln>
-          <a:effectLst/>
-        </p:spPr>
-        <p:style>
-          <a:lnRef idx="1">
-            <a:schemeClr val="accent1"/>
-          </a:lnRef>
-          <a:fillRef idx="3">
-            <a:schemeClr val="accent1"/>
-          </a:fillRef>
-          <a:effectRef idx="2">
-            <a:schemeClr val="accent1"/>
-          </a:effectRef>
-          <a:fontRef idx="minor">
-            <a:schemeClr val="lt1"/>
-          </a:fontRef>
-        </p:style>
-        <p:txBody>
-          <a:bodyPr rtlCol="0" anchor="ctr"/>
-          <a:lstStyle/>
-          <a:p>
-            <a:pPr algn="ctr"/>
-          </a:p>
-        </p:txBody>
-      </p:sp>
-      <p:pic>
-        <p:nvPicPr>
-          <p:cNvPr id="3" name="Picture 2" descr="td-happy-seedling-1.png"/>
-          <p:cNvPicPr>
-            <a:picLocks noChangeAspect="1"/>
-          </p:cNvPicPr>
-          <p:nvPr/>
-        </p:nvPicPr>
-        <p:blipFill>
-          <a:blip r:embed="rId3"/>
-          <a:stretch>
-            <a:fillRect/>
-          </a:stretch>
-        </p:blipFill>
-        <p:spPr>
-          <a:xfrm>
-            <a:off x="952500" y="2416617"/>
-            <a:ext cx="4000500" cy="4501265"/>
-          </a:xfrm>
-          <a:prstGeom prst="rect">
-            <a:avLst/>
-          </a:prstGeom>
-        </p:spPr>
-      </p:pic>
-      <p:pic>
-        <p:nvPicPr>
-          <p:cNvPr id="4" name="Picture 3" descr="td-dried-flowers-1-1.png"/>
-          <p:cNvPicPr>
-            <a:picLocks noChangeAspect="1"/>
-          </p:cNvPicPr>
-          <p:nvPr/>
-        </p:nvPicPr>
-        <p:blipFill>
-          <a:blip r:embed="rId4"/>
-          <a:stretch>
-            <a:fillRect/>
-          </a:stretch>
-        </p:blipFill>
-        <p:spPr>
-          <a:xfrm>
-            <a:off x="5334000" y="2086282"/>
-            <a:ext cx="4000499" cy="5161935"/>
-          </a:xfrm>
-          <a:prstGeom prst="rect">
-            <a:avLst/>
-          </a:prstGeom>
-        </p:spPr>
-      </p:pic>
-      <p:sp>
-        <p:nvSpPr>
-          <p:cNvPr id="5" name="TextBox 4"/>
-          <p:cNvSpPr txBox="1"/>
-          <p:nvPr/>
-        </p:nvSpPr>
-        <p:spPr>
-          <a:xfrm>
-            <a:off x="762000" y="8896350"/>
-            <a:ext cx="8763000" cy="838181"/>
-          </a:xfrm>
-          <a:prstGeom prst="rect">
-            <a:avLst/>
-          </a:prstGeom>
-          <a:noFill/>
-        </p:spPr>
-        <p:txBody>
-          <a:bodyPr wrap="square" lIns="0" rIns="0" tIns="0" bIns="0" anchor="t">
-            <a:spAutoFit/>
-          </a:bodyPr>
-          <a:lstStyle/>
-          <a:p>
-            <a:pPr algn="l">
-              <a:lnSpc>
-                <a:spcPct val="100000"/>
-              </a:lnSpc>
-            </a:pPr>
-            <a:r>
-              <a:rPr sz="5000" b="1" i="0">
-                <a:solidFill>
-                  <a:srgbClr val="31662F"/>
-                </a:solidFill>
-                <a:latin typeface="Montserrat"/>
-              </a:rPr>
-              <a:t>Elena Kalli</a:t>
-            </a:r>
-          </a:p>
-        </p:txBody>
-      </p:sp>
-      <p:sp>
-        <p:nvSpPr>
-          <p:cNvPr id="6" name="TextBox 5"/>
-          <p:cNvSpPr txBox="1"/>
-          <p:nvPr/>
-        </p:nvSpPr>
-        <p:spPr>
-          <a:xfrm>
-            <a:off x="762000" y="9696431"/>
-            <a:ext cx="8763000" cy="471173"/>
-          </a:xfrm>
-          <a:prstGeom prst="rect">
-            <a:avLst/>
-          </a:prstGeom>
-          <a:noFill/>
-        </p:spPr>
-        <p:txBody>
-          <a:bodyPr wrap="square" lIns="0" rIns="0" tIns="0" bIns="0" anchor="t">
-            <a:spAutoFit/>
-          </a:bodyPr>
-          <a:lstStyle/>
-          <a:p>
-            <a:pPr algn="l">
-              <a:lnSpc>
-                <a:spcPct val="115000"/>
-              </a:lnSpc>
-            </a:pPr>
-            <a:r>
-              <a:rPr sz="2200" b="0" i="0">
-                <a:solidFill>
-                  <a:srgbClr val="1A1A1A"/>
-                </a:solidFill>
-                <a:latin typeface="Source Sans 3"/>
-              </a:rPr>
-              <a:t>Advanced Programs Admin</a:t>
-            </a:r>
-          </a:p>
-        </p:txBody>
-      </p:sp>
-      <p:sp>
-        <p:nvSpPr>
-          <p:cNvPr id="7" name="TextBox 6"/>
-          <p:cNvSpPr txBox="1"/>
-          <p:nvPr/>
-        </p:nvSpPr>
-        <p:spPr>
-          <a:xfrm>
-            <a:off x="6667500" y="12192000"/>
-            <a:ext cx="2857500" cy="285750"/>
-          </a:xfrm>
-          <a:prstGeom prst="rect">
-            <a:avLst/>
-          </a:prstGeom>
-          <a:noFill/>
-        </p:spPr>
-        <p:txBody>
-          <a:bodyPr wrap="square" lIns="0" rIns="0" tIns="0" bIns="0" anchor="t">
-            <a:spAutoFit/>
-          </a:bodyPr>
-          <a:lstStyle/>
-          <a:p>
-            <a:pPr algn="r">
-              <a:lnSpc>
-                <a:spcPct val="120000"/>
-              </a:lnSpc>
-            </a:pPr>
-            <a:r>
-              <a:rPr sz="1800" b="1" i="0">
-                <a:solidFill>
-                  <a:srgbClr val="31662F"/>
-                </a:solidFill>
-                <a:latin typeface="Montserrat"/>
-              </a:rPr>
-              <a:t>soilfoodweb.com</a:t>
-            </a:r>
-          </a:p>
-        </p:txBody>
-      </p:sp>
-    </p:spTree>
-  </p:cSld>
-  <p:clrMapOvr>
-    <a:masterClrMapping/>
-  </p:clrMapOvr>
-</p:sld>
-</file>
-
-<file path=ppt/slides/slide13.xml><?xml version="1.0" encoding="utf-8"?>
-<p:sld xmlns:a="http://schemas.openxmlformats.org/drawingml/2006/main" xmlns:p="http://schemas.openxmlformats.org/presentationml/2006/main" xmlns:r="http://schemas.openxmlformats.org/officeDocument/2006/relationships">
-  <p:cSld>
-    <p:bg>
-      <p:bgPr>
-        <a:solidFill>
-          <a:srgbClr val="F3F1EA"/>
-        </a:solidFill>
-        <a:effectLst/>
-      </p:bgPr>
-    </p:bg>
-    <p:spTree>
-      <p:nvGrpSpPr>
-        <p:cNvPr id="1" name=""/>
-        <p:cNvGrpSpPr/>
-        <p:nvPr/>
-      </p:nvGrpSpPr>
-      <p:grpSpPr/>
-      <p:sp>
-        <p:nvSpPr>
-          <p:cNvPr id="2" name="Rectangle 1"/>
-          <p:cNvSpPr/>
-          <p:nvPr/>
-        </p:nvSpPr>
-        <p:spPr>
-          <a:xfrm>
-            <a:off x="762000" y="762000"/>
-            <a:ext cx="8763000" cy="7810500"/>
-          </a:xfrm>
-          <a:prstGeom prst="rect">
-            <a:avLst/>
-          </a:prstGeom>
-          <a:solidFill>
-            <a:srgbClr val="E4E6DC"/>
-          </a:solidFill>
-          <a:ln>
-            <a:noFill/>
-          </a:ln>
-          <a:effectLst/>
-        </p:spPr>
-        <p:style>
-          <a:lnRef idx="1">
-            <a:schemeClr val="accent1"/>
-          </a:lnRef>
-          <a:fillRef idx="3">
-            <a:schemeClr val="accent1"/>
-          </a:fillRef>
-          <a:effectRef idx="2">
-            <a:schemeClr val="accent1"/>
-          </a:effectRef>
-          <a:fontRef idx="minor">
-            <a:schemeClr val="lt1"/>
-          </a:fontRef>
-        </p:style>
-        <p:txBody>
-          <a:bodyPr rtlCol="0" anchor="ctr"/>
-          <a:lstStyle/>
-          <a:p>
-            <a:pPr algn="ctr"/>
-          </a:p>
-        </p:txBody>
-      </p:sp>
-      <p:pic>
-        <p:nvPicPr>
-          <p:cNvPr id="3" name="Picture 2" descr="td-leaf-sprig-paper-1.png"/>
-          <p:cNvPicPr>
-            <a:picLocks noChangeAspect="1"/>
-          </p:cNvPicPr>
-          <p:nvPr/>
-        </p:nvPicPr>
-        <p:blipFill>
-          <a:blip r:embed="rId3"/>
-          <a:stretch>
-            <a:fillRect/>
-          </a:stretch>
-        </p:blipFill>
-        <p:spPr>
-          <a:xfrm>
-            <a:off x="952500" y="1466850"/>
-            <a:ext cx="4000500" cy="6400800"/>
-          </a:xfrm>
-          <a:prstGeom prst="rect">
-            <a:avLst/>
-          </a:prstGeom>
-        </p:spPr>
-      </p:pic>
-      <p:pic>
-        <p:nvPicPr>
-          <p:cNvPr id="4" name="Picture 3" descr="td-dandelion-short-root-1.png"/>
-          <p:cNvPicPr>
-            <a:picLocks noChangeAspect="1"/>
-          </p:cNvPicPr>
-          <p:nvPr/>
-        </p:nvPicPr>
-        <p:blipFill>
-          <a:blip r:embed="rId4"/>
-          <a:stretch>
-            <a:fillRect/>
-          </a:stretch>
-        </p:blipFill>
-        <p:spPr>
-          <a:xfrm>
-            <a:off x="5338643" y="1143000"/>
-            <a:ext cx="3991213" cy="7048500"/>
-          </a:xfrm>
-          <a:prstGeom prst="rect">
-            <a:avLst/>
-          </a:prstGeom>
-        </p:spPr>
-      </p:pic>
-      <p:sp>
-        <p:nvSpPr>
-          <p:cNvPr id="5" name="TextBox 4"/>
-          <p:cNvSpPr txBox="1"/>
-          <p:nvPr/>
-        </p:nvSpPr>
-        <p:spPr>
-          <a:xfrm>
-            <a:off x="762000" y="8896350"/>
-            <a:ext cx="8763000" cy="838181"/>
-          </a:xfrm>
-          <a:prstGeom prst="rect">
-            <a:avLst/>
-          </a:prstGeom>
-          <a:noFill/>
-        </p:spPr>
-        <p:txBody>
-          <a:bodyPr wrap="square" lIns="0" rIns="0" tIns="0" bIns="0" anchor="t">
-            <a:spAutoFit/>
-          </a:bodyPr>
-          <a:lstStyle/>
-          <a:p>
-            <a:pPr algn="l">
-              <a:lnSpc>
-                <a:spcPct val="100000"/>
-              </a:lnSpc>
-            </a:pPr>
-            <a:r>
-              <a:rPr sz="5000" b="1" i="0">
-                <a:solidFill>
-                  <a:srgbClr val="31662F"/>
-                </a:solidFill>
-                <a:latin typeface="Montserrat"/>
-              </a:rPr>
-              <a:t>Ib Borup Pederson</a:t>
-            </a:r>
-          </a:p>
-        </p:txBody>
-      </p:sp>
-      <p:sp>
-        <p:nvSpPr>
-          <p:cNvPr id="6" name="TextBox 5"/>
-          <p:cNvSpPr txBox="1"/>
-          <p:nvPr/>
-        </p:nvSpPr>
-        <p:spPr>
-          <a:xfrm>
-            <a:off x="762000" y="9696431"/>
-            <a:ext cx="8763000" cy="471173"/>
-          </a:xfrm>
-          <a:prstGeom prst="rect">
-            <a:avLst/>
-          </a:prstGeom>
-          <a:noFill/>
-        </p:spPr>
-        <p:txBody>
-          <a:bodyPr wrap="square" lIns="0" rIns="0" tIns="0" bIns="0" anchor="t">
-            <a:spAutoFit/>
-          </a:bodyPr>
-          <a:lstStyle/>
-          <a:p>
-            <a:pPr algn="l">
-              <a:lnSpc>
-                <a:spcPct val="115000"/>
-              </a:lnSpc>
-            </a:pPr>
-            <a:r>
-              <a:rPr sz="2200" b="0" i="0">
-                <a:solidFill>
-                  <a:srgbClr val="1A1A1A"/>
-                </a:solidFill>
-                <a:latin typeface="Source Sans 3"/>
-              </a:rPr>
-              <a:t>Advanced Programs Mentor</a:t>
-            </a:r>
-          </a:p>
-        </p:txBody>
-      </p:sp>
-      <p:sp>
-        <p:nvSpPr>
-          <p:cNvPr id="7" name="TextBox 6"/>
-          <p:cNvSpPr txBox="1"/>
-          <p:nvPr/>
-        </p:nvSpPr>
-        <p:spPr>
-          <a:xfrm>
-            <a:off x="6667500" y="12192000"/>
-            <a:ext cx="2857500" cy="285750"/>
-          </a:xfrm>
-          <a:prstGeom prst="rect">
-            <a:avLst/>
-          </a:prstGeom>
-          <a:noFill/>
-        </p:spPr>
-        <p:txBody>
-          <a:bodyPr wrap="square" lIns="0" rIns="0" tIns="0" bIns="0" anchor="t">
-            <a:spAutoFit/>
-          </a:bodyPr>
-          <a:lstStyle/>
-          <a:p>
-            <a:pPr algn="r">
-              <a:lnSpc>
-                <a:spcPct val="120000"/>
-              </a:lnSpc>
-            </a:pPr>
-            <a:r>
-              <a:rPr sz="1800" b="1" i="0">
-                <a:solidFill>
-                  <a:srgbClr val="31662F"/>
-                </a:solidFill>
-                <a:latin typeface="Montserrat"/>
-              </a:rPr>
-              <a:t>soilfoodweb.com</a:t>
-            </a:r>
-          </a:p>
-        </p:txBody>
-      </p:sp>
-    </p:spTree>
-  </p:cSld>
-  <p:clrMapOvr>
-    <a:masterClrMapping/>
-  </p:clrMapOvr>
-</p:sld>
-</file>
-
-<file path=ppt/slides/slide14.xml><?xml version="1.0" encoding="utf-8"?>
-<p:sld xmlns:a="http://schemas.openxmlformats.org/drawingml/2006/main" xmlns:p="http://schemas.openxmlformats.org/presentationml/2006/main" xmlns:r="http://schemas.openxmlformats.org/officeDocument/2006/relationships">
-  <p:cSld>
-    <p:bg>
-      <p:bgPr>
-        <a:solidFill>
-          <a:srgbClr val="F3F1EA"/>
-        </a:solidFill>
-        <a:effectLst/>
-      </p:bgPr>
-    </p:bg>
-    <p:spTree>
-      <p:nvGrpSpPr>
-        <p:cNvPr id="1" name=""/>
-        <p:cNvGrpSpPr/>
-        <p:nvPr/>
-      </p:nvGrpSpPr>
-      <p:grpSpPr/>
-      <p:pic>
-        <p:nvPicPr>
-          <p:cNvPr id="2" name="Picture 1" descr="7524750207797058540.jpg"/>
-          <p:cNvPicPr>
-            <a:picLocks noChangeAspect="1"/>
-          </p:cNvPicPr>
-          <p:nvPr/>
-        </p:nvPicPr>
-        <p:blipFill>
-          <a:blip r:embed="rId3"/>
-          <a:stretch>
-            <a:fillRect/>
-          </a:stretch>
-        </p:blipFill>
-        <p:spPr>
-          <a:xfrm>
-            <a:off x="762000" y="762000"/>
-            <a:ext cx="8763000" cy="5334000"/>
-          </a:xfrm>
-          <a:prstGeom prst="rect">
-            <a:avLst/>
-          </a:prstGeom>
-        </p:spPr>
-      </p:pic>
-      <p:pic>
-        <p:nvPicPr>
-          <p:cNvPr id="3" name="Picture 2" descr="td-dried-flowers-2-1.png"/>
-          <p:cNvPicPr>
-            <a:picLocks noChangeAspect="1"/>
-          </p:cNvPicPr>
-          <p:nvPr/>
-        </p:nvPicPr>
-        <p:blipFill>
-          <a:blip r:embed="rId4"/>
-          <a:stretch>
-            <a:fillRect/>
-          </a:stretch>
-        </p:blipFill>
-        <p:spPr>
-          <a:xfrm>
-            <a:off x="8178819" y="4953000"/>
-            <a:ext cx="1454110" cy="2190749"/>
-          </a:xfrm>
-          <a:prstGeom prst="rect">
-            <a:avLst/>
-          </a:prstGeom>
-        </p:spPr>
-      </p:pic>
-      <p:sp>
-        <p:nvSpPr>
-          <p:cNvPr id="4" name="TextBox 3"/>
-          <p:cNvSpPr txBox="1"/>
-          <p:nvPr/>
-        </p:nvSpPr>
-        <p:spPr>
-          <a:xfrm>
-            <a:off x="762000" y="6419850"/>
-            <a:ext cx="8763000" cy="838181"/>
-          </a:xfrm>
-          <a:prstGeom prst="rect">
-            <a:avLst/>
-          </a:prstGeom>
-          <a:noFill/>
-        </p:spPr>
-        <p:txBody>
-          <a:bodyPr wrap="square" lIns="0" rIns="0" tIns="0" bIns="0" anchor="t">
-            <a:spAutoFit/>
-          </a:bodyPr>
-          <a:lstStyle/>
-          <a:p>
-            <a:pPr algn="l">
-              <a:lnSpc>
-                <a:spcPct val="100000"/>
-              </a:lnSpc>
-            </a:pPr>
-            <a:r>
-              <a:rPr sz="5000" b="1" i="0">
-                <a:solidFill>
-                  <a:srgbClr val="31662F"/>
-                </a:solidFill>
-                <a:latin typeface="Montserrat"/>
-              </a:rPr>
-              <a:t>Nick Padwick</a:t>
-            </a:r>
-          </a:p>
-        </p:txBody>
-      </p:sp>
-      <p:sp>
-        <p:nvSpPr>
-          <p:cNvPr id="5" name="TextBox 4"/>
-          <p:cNvSpPr txBox="1"/>
-          <p:nvPr/>
-        </p:nvSpPr>
-        <p:spPr>
-          <a:xfrm>
-            <a:off x="762000" y="7219931"/>
-            <a:ext cx="8763000" cy="471173"/>
-          </a:xfrm>
-          <a:prstGeom prst="rect">
-            <a:avLst/>
-          </a:prstGeom>
-          <a:noFill/>
-        </p:spPr>
-        <p:txBody>
-          <a:bodyPr wrap="square" lIns="0" rIns="0" tIns="0" bIns="0" anchor="t">
-            <a:spAutoFit/>
-          </a:bodyPr>
-          <a:lstStyle/>
-          <a:p>
-            <a:pPr algn="l">
-              <a:lnSpc>
-                <a:spcPct val="115000"/>
-              </a:lnSpc>
-            </a:pPr>
-            <a:r>
-              <a:rPr sz="2200" b="0" i="0">
-                <a:solidFill>
-                  <a:srgbClr val="1A1A1A"/>
-                </a:solidFill>
-                <a:latin typeface="Source Sans 3"/>
-              </a:rPr>
-              <a:t>Advanced Programs Mentor</a:t>
-            </a:r>
-          </a:p>
-        </p:txBody>
-      </p:sp>
-      <p:sp>
-        <p:nvSpPr>
-          <p:cNvPr id="6" name="TextBox 5"/>
-          <p:cNvSpPr txBox="1"/>
-          <p:nvPr/>
-        </p:nvSpPr>
-        <p:spPr>
-          <a:xfrm>
-            <a:off x="762000" y="7843504"/>
-            <a:ext cx="8763000" cy="1393894"/>
-          </a:xfrm>
-          <a:prstGeom prst="rect">
-            <a:avLst/>
-          </a:prstGeom>
-          <a:noFill/>
-        </p:spPr>
-        <p:txBody>
-          <a:bodyPr wrap="square" lIns="0" rIns="0" tIns="0" bIns="0" anchor="t">
-            <a:spAutoFit/>
-          </a:bodyPr>
-          <a:lstStyle/>
-          <a:p>
-            <a:pPr algn="l">
-              <a:lnSpc>
-                <a:spcPct val="115000"/>
-              </a:lnSpc>
-            </a:pPr>
-            <a:r>
-              <a:rPr sz="3800" b="0" i="1">
-                <a:solidFill>
-                  <a:srgbClr val="1A1A1A"/>
-                </a:solidFill>
-                <a:latin typeface="EB Garamond"/>
-              </a:rPr>
-              <a:t>“I make 750 tons of compost a year. Biology works at any scale.”</a:t>
-            </a:r>
-          </a:p>
-        </p:txBody>
-      </p:sp>
-      <p:sp>
-        <p:nvSpPr>
-          <p:cNvPr id="7" name="TextBox 6"/>
-          <p:cNvSpPr txBox="1"/>
-          <p:nvPr/>
-        </p:nvSpPr>
-        <p:spPr>
-          <a:xfrm>
-            <a:off x="762000" y="9332648"/>
-            <a:ext cx="8763000" cy="983795"/>
-          </a:xfrm>
-          <a:prstGeom prst="rect">
-            <a:avLst/>
-          </a:prstGeom>
-          <a:noFill/>
-        </p:spPr>
-        <p:txBody>
-          <a:bodyPr wrap="square" lIns="0" rIns="0" tIns="0" bIns="0" anchor="t">
-            <a:spAutoFit/>
-          </a:bodyPr>
-          <a:lstStyle/>
-          <a:p>
-            <a:pPr algn="l">
-              <a:lnSpc>
-                <a:spcPct val="115000"/>
-              </a:lnSpc>
-            </a:pPr>
-            <a:r>
-              <a:rPr sz="2600" b="0" i="0">
-                <a:solidFill>
-                  <a:srgbClr val="31662F"/>
-                </a:solidFill>
-                <a:latin typeface="Source Sans 3"/>
-              </a:rPr>
-              <a:t>Manages Ken Hill Estate, home of Wild Ken Hill, in West Norfolk, England. Farmers Weekly Farmer of the Year, 2009.</a:t>
-            </a:r>
-          </a:p>
-        </p:txBody>
-      </p:sp>
-      <p:sp>
-        <p:nvSpPr>
-          <p:cNvPr id="8" name="TextBox 7"/>
-          <p:cNvSpPr txBox="1"/>
-          <p:nvPr/>
-        </p:nvSpPr>
-        <p:spPr>
-          <a:xfrm>
-            <a:off x="6667500" y="12192000"/>
-            <a:ext cx="2857500" cy="285750"/>
-          </a:xfrm>
-          <a:prstGeom prst="rect">
-            <a:avLst/>
-          </a:prstGeom>
-          <a:noFill/>
-        </p:spPr>
-        <p:txBody>
-          <a:bodyPr wrap="square" lIns="0" rIns="0" tIns="0" bIns="0" anchor="t">
-            <a:spAutoFit/>
-          </a:bodyPr>
-          <a:lstStyle/>
-          <a:p>
-            <a:pPr algn="r">
-              <a:lnSpc>
-                <a:spcPct val="120000"/>
-              </a:lnSpc>
-            </a:pPr>
-            <a:r>
-              <a:rPr sz="1800" b="1" i="0">
-                <a:solidFill>
-                  <a:srgbClr val="31662F"/>
-                </a:solidFill>
-                <a:latin typeface="Montserrat"/>
-              </a:rPr>
-              <a:t>soilfoodweb.com</a:t>
-            </a:r>
-          </a:p>
-        </p:txBody>
-      </p:sp>
-    </p:spTree>
-  </p:cSld>
-  <p:clrMapOvr>
-    <a:masterClrMapping/>
-  </p:clrMapOvr>
-</p:sld>
-</file>
-
-<file path=ppt/slides/slide15.xml><?xml version="1.0" encoding="utf-8"?>
-<p:sld xmlns:a="http://schemas.openxmlformats.org/drawingml/2006/main" xmlns:p="http://schemas.openxmlformats.org/presentationml/2006/main" xmlns:r="http://schemas.openxmlformats.org/officeDocument/2006/relationships">
-  <p:cSld>
-    <p:bg>
-      <p:bgPr>
-        <a:solidFill>
-          <a:srgbClr val="F3F1EA"/>
-        </a:solidFill>
-        <a:effectLst/>
-      </p:bgPr>
-    </p:bg>
-    <p:spTree>
-      <p:nvGrpSpPr>
-        <p:cNvPr id="1" name=""/>
-        <p:cNvGrpSpPr/>
-        <p:nvPr/>
-      </p:nvGrpSpPr>
-      <p:grpSpPr/>
-      <p:sp>
-        <p:nvSpPr>
-          <p:cNvPr id="2" name="Rectangle 1"/>
-          <p:cNvSpPr/>
-          <p:nvPr/>
-        </p:nvSpPr>
-        <p:spPr>
-          <a:xfrm>
-            <a:off x="762000" y="762000"/>
-            <a:ext cx="8763000" cy="7810500"/>
-          </a:xfrm>
-          <a:prstGeom prst="rect">
-            <a:avLst/>
-          </a:prstGeom>
-          <a:solidFill>
-            <a:srgbClr val="E4E6DC"/>
-          </a:solidFill>
-          <a:ln>
-            <a:noFill/>
-          </a:ln>
-          <a:effectLst/>
-        </p:spPr>
-        <p:style>
-          <a:lnRef idx="1">
-            <a:schemeClr val="accent1"/>
-          </a:lnRef>
-          <a:fillRef idx="3">
-            <a:schemeClr val="accent1"/>
-          </a:fillRef>
-          <a:effectRef idx="2">
-            <a:schemeClr val="accent1"/>
-          </a:effectRef>
-          <a:fontRef idx="minor">
-            <a:schemeClr val="lt1"/>
-          </a:fontRef>
-        </p:style>
-        <p:txBody>
-          <a:bodyPr rtlCol="0" anchor="ctr"/>
-          <a:lstStyle/>
-          <a:p>
-            <a:pPr algn="ctr"/>
-          </a:p>
-        </p:txBody>
-      </p:sp>
-      <p:pic>
-        <p:nvPicPr>
-          <p:cNvPr id="3" name="Picture 2" descr="td-tithonia-flower-1.png"/>
-          <p:cNvPicPr>
-            <a:picLocks noChangeAspect="1"/>
-          </p:cNvPicPr>
-          <p:nvPr/>
-        </p:nvPicPr>
-        <p:blipFill>
-          <a:blip r:embed="rId3"/>
-          <a:stretch>
-            <a:fillRect/>
-          </a:stretch>
-        </p:blipFill>
-        <p:spPr>
-          <a:xfrm>
-            <a:off x="952500" y="2236627"/>
-            <a:ext cx="2540000" cy="4861244"/>
-          </a:xfrm>
-          <a:prstGeom prst="rect">
-            <a:avLst/>
-          </a:prstGeom>
-        </p:spPr>
-      </p:pic>
-      <p:pic>
-        <p:nvPicPr>
-          <p:cNvPr id="4" name="Picture 3" descr="td-dried-flowers-1-1.png"/>
-          <p:cNvPicPr>
-            <a:picLocks noChangeAspect="1"/>
-          </p:cNvPicPr>
-          <p:nvPr/>
-        </p:nvPicPr>
-        <p:blipFill>
-          <a:blip r:embed="rId4"/>
-          <a:stretch>
-            <a:fillRect/>
-          </a:stretch>
-        </p:blipFill>
-        <p:spPr>
-          <a:xfrm>
-            <a:off x="3873500" y="3028540"/>
-            <a:ext cx="2540000" cy="3277419"/>
-          </a:xfrm>
-          <a:prstGeom prst="rect">
-            <a:avLst/>
-          </a:prstGeom>
-        </p:spPr>
-      </p:pic>
-      <p:pic>
-        <p:nvPicPr>
-          <p:cNvPr id="5" name="Picture 4" descr="td-leaf-sprig-paper-1.png"/>
-          <p:cNvPicPr>
-            <a:picLocks noChangeAspect="1"/>
-          </p:cNvPicPr>
-          <p:nvPr/>
-        </p:nvPicPr>
-        <p:blipFill>
-          <a:blip r:embed="rId5"/>
-          <a:stretch>
-            <a:fillRect/>
-          </a:stretch>
-        </p:blipFill>
-        <p:spPr>
-          <a:xfrm>
-            <a:off x="6794500" y="2635249"/>
-            <a:ext cx="2540000" cy="4064000"/>
-          </a:xfrm>
-          <a:prstGeom prst="rect">
-            <a:avLst/>
-          </a:prstGeom>
-        </p:spPr>
-      </p:pic>
-      <p:sp>
-        <p:nvSpPr>
-          <p:cNvPr id="6" name="TextBox 5"/>
-          <p:cNvSpPr txBox="1"/>
-          <p:nvPr/>
-        </p:nvSpPr>
-        <p:spPr>
-          <a:xfrm>
-            <a:off x="762000" y="8896350"/>
-            <a:ext cx="8763000" cy="838181"/>
-          </a:xfrm>
-          <a:prstGeom prst="rect">
-            <a:avLst/>
-          </a:prstGeom>
-          <a:noFill/>
-        </p:spPr>
-        <p:txBody>
-          <a:bodyPr wrap="square" lIns="0" rIns="0" tIns="0" bIns="0" anchor="t">
-            <a:spAutoFit/>
-          </a:bodyPr>
-          <a:lstStyle/>
-          <a:p>
-            <a:pPr algn="l">
-              <a:lnSpc>
-                <a:spcPct val="100000"/>
-              </a:lnSpc>
-            </a:pPr>
-            <a:r>
-              <a:rPr sz="5000" b="1" i="0">
-                <a:solidFill>
-                  <a:srgbClr val="31662F"/>
-                </a:solidFill>
-                <a:latin typeface="Montserrat"/>
-              </a:rPr>
-              <a:t>Delvin Solkinson</a:t>
-            </a:r>
-          </a:p>
-        </p:txBody>
-      </p:sp>
-      <p:sp>
-        <p:nvSpPr>
-          <p:cNvPr id="7" name="TextBox 6"/>
-          <p:cNvSpPr txBox="1"/>
-          <p:nvPr/>
-        </p:nvSpPr>
-        <p:spPr>
-          <a:xfrm>
-            <a:off x="762000" y="9696431"/>
-            <a:ext cx="8763000" cy="471173"/>
-          </a:xfrm>
-          <a:prstGeom prst="rect">
-            <a:avLst/>
-          </a:prstGeom>
-          <a:noFill/>
-        </p:spPr>
-        <p:txBody>
-          <a:bodyPr wrap="square" lIns="0" rIns="0" tIns="0" bIns="0" anchor="t">
-            <a:spAutoFit/>
-          </a:bodyPr>
-          <a:lstStyle/>
-          <a:p>
-            <a:pPr algn="l">
-              <a:lnSpc>
-                <a:spcPct val="115000"/>
-              </a:lnSpc>
-            </a:pPr>
-            <a:r>
-              <a:rPr sz="2200" b="0" i="0">
-                <a:solidFill>
-                  <a:srgbClr val="1A1A1A"/>
-                </a:solidFill>
-                <a:latin typeface="Source Sans 3"/>
-              </a:rPr>
-              <a:t>Permaculture Lead Teacher</a:t>
-            </a:r>
-          </a:p>
-        </p:txBody>
-      </p:sp>
-      <p:sp>
-        <p:nvSpPr>
-          <p:cNvPr id="8" name="TextBox 7"/>
-          <p:cNvSpPr txBox="1"/>
-          <p:nvPr/>
-        </p:nvSpPr>
-        <p:spPr>
-          <a:xfrm>
-            <a:off x="6667500" y="12192000"/>
-            <a:ext cx="2857500" cy="285750"/>
-          </a:xfrm>
-          <a:prstGeom prst="rect">
-            <a:avLst/>
-          </a:prstGeom>
-          <a:noFill/>
-        </p:spPr>
-        <p:txBody>
-          <a:bodyPr wrap="square" lIns="0" rIns="0" tIns="0" bIns="0" anchor="t">
-            <a:spAutoFit/>
-          </a:bodyPr>
-          <a:lstStyle/>
-          <a:p>
-            <a:pPr algn="r">
-              <a:lnSpc>
-                <a:spcPct val="120000"/>
-              </a:lnSpc>
-            </a:pPr>
-            <a:r>
-              <a:rPr sz="1800" b="1" i="0">
-                <a:solidFill>
-                  <a:srgbClr val="31662F"/>
-                </a:solidFill>
-                <a:latin typeface="Montserrat"/>
-              </a:rPr>
-              <a:t>soilfoodweb.com</a:t>
-            </a:r>
-          </a:p>
-        </p:txBody>
-      </p:sp>
-    </p:spTree>
-  </p:cSld>
-  <p:clrMapOvr>
-    <a:masterClrMapping/>
-  </p:clrMapOvr>
-</p:sld>
-</file>
-
-<file path=ppt/slides/slide16.xml><?xml version="1.0" encoding="utf-8"?>
-<p:sld xmlns:a="http://schemas.openxmlformats.org/drawingml/2006/main" xmlns:p="http://schemas.openxmlformats.org/presentationml/2006/main" xmlns:r="http://schemas.openxmlformats.org/officeDocument/2006/relationships">
-  <p:cSld>
-    <p:bg>
-      <p:bgPr>
-        <a:solidFill>
-          <a:srgbClr val="31662F"/>
-        </a:solidFill>
-        <a:effectLst/>
-      </p:bgPr>
-    </p:bg>
-    <p:spTree>
-      <p:nvGrpSpPr>
-        <p:cNvPr id="1" name=""/>
-        <p:cNvGrpSpPr/>
-        <p:nvPr/>
-      </p:nvGrpSpPr>
-      <p:grpSpPr/>
-      <p:sp>
-        <p:nvSpPr>
-          <p:cNvPr id="2" name="TextBox 1"/>
-          <p:cNvSpPr txBox="1"/>
-          <p:nvPr/>
-        </p:nvSpPr>
-        <p:spPr>
-          <a:xfrm>
-            <a:off x="762000" y="1333500"/>
-            <a:ext cx="8763000" cy="2476500"/>
-          </a:xfrm>
-          <a:prstGeom prst="rect">
-            <a:avLst/>
-          </a:prstGeom>
-          <a:noFill/>
-        </p:spPr>
-        <p:txBody>
-          <a:bodyPr wrap="square" lIns="0" rIns="0" tIns="0" bIns="0" anchor="t">
-            <a:spAutoFit/>
-          </a:bodyPr>
-          <a:lstStyle/>
-          <a:p>
-            <a:pPr algn="l">
-              <a:lnSpc>
-                <a:spcPct val="108000"/>
-              </a:lnSpc>
-            </a:pPr>
-            <a:r>
-              <a:rPr sz="5200" b="1" i="0">
-                <a:solidFill>
-                  <a:srgbClr val="F3F1EA"/>
-                </a:solidFill>
-                <a:latin typeface="Montserrat"/>
-              </a:rPr>
-              <a:t>Thank you to every mentor who teaches our students to see soil.</a:t>
-            </a:r>
-          </a:p>
-        </p:txBody>
-      </p:sp>
-      <p:sp>
-        <p:nvSpPr>
-          <p:cNvPr id="3" name="TextBox 2"/>
-          <p:cNvSpPr txBox="1"/>
-          <p:nvPr/>
-        </p:nvSpPr>
-        <p:spPr>
-          <a:xfrm>
-            <a:off x="762000" y="4476750"/>
-            <a:ext cx="8763000" cy="3619500"/>
-          </a:xfrm>
-          <a:prstGeom prst="rect">
-            <a:avLst/>
-          </a:prstGeom>
-          <a:noFill/>
-        </p:spPr>
-        <p:txBody>
-          <a:bodyPr wrap="square" lIns="0" rIns="0" tIns="0" bIns="0" anchor="t">
-            <a:spAutoFit/>
-          </a:bodyPr>
-          <a:lstStyle/>
-          <a:p>
-            <a:pPr algn="l">
-              <a:lnSpc>
-                <a:spcPct val="135000"/>
-              </a:lnSpc>
-            </a:pPr>
-            <a:r>
-              <a:rPr sz="3000" b="0" i="1">
-                <a:solidFill>
-                  <a:srgbClr val="F3F1EA"/>
-                </a:solidFill>
-                <a:latin typeface="EB Garamond"/>
-              </a:rPr>
-              <a:t>Tommy Tepper · Loida Vasquez · Carla Portugal · Wesley Sanders · Casey Williams · Brian Daubenspeck · Isadora Schmidt · Aysen Ustunay · Dora Tkalec · Gerald Ramirez · Elena Kalli · Ib Borup Pederson · Nick Padwick · Delvin Solkinson</a:t>
-            </a:r>
-          </a:p>
-        </p:txBody>
-      </p:sp>
-      <p:pic>
-        <p:nvPicPr>
-          <p:cNvPr id="4" name="Picture 3" descr="td-leaf-sprig-paper-1.png"/>
-          <p:cNvPicPr>
-            <a:picLocks noChangeAspect="1"/>
-          </p:cNvPicPr>
-          <p:nvPr/>
-        </p:nvPicPr>
-        <p:blipFill>
-          <a:blip r:embed="rId3"/>
-          <a:stretch>
-            <a:fillRect/>
-          </a:stretch>
-        </p:blipFill>
-        <p:spPr>
-          <a:xfrm>
-            <a:off x="762000" y="8991600"/>
-            <a:ext cx="1619250" cy="2590800"/>
-          </a:xfrm>
-          <a:prstGeom prst="rect">
-            <a:avLst/>
-          </a:prstGeom>
-        </p:spPr>
-      </p:pic>
-      <p:pic>
-        <p:nvPicPr>
-          <p:cNvPr id="5" name="Picture 4" descr="td-dried-flowers-2-1.png"/>
-          <p:cNvPicPr>
-            <a:picLocks noChangeAspect="1"/>
-          </p:cNvPicPr>
-          <p:nvPr/>
-        </p:nvPicPr>
-        <p:blipFill>
-          <a:blip r:embed="rId4"/>
-          <a:stretch>
-            <a:fillRect/>
-          </a:stretch>
-        </p:blipFill>
-        <p:spPr>
-          <a:xfrm>
-            <a:off x="2571750" y="9067225"/>
-            <a:ext cx="1619250" cy="2439548"/>
-          </a:xfrm>
-          <a:prstGeom prst="rect">
-            <a:avLst/>
-          </a:prstGeom>
-        </p:spPr>
-      </p:pic>
-      <p:pic>
-        <p:nvPicPr>
-          <p:cNvPr id="6" name="Picture 5" descr="td-tithonia-flower-1.png"/>
-          <p:cNvPicPr>
-            <a:picLocks noChangeAspect="1"/>
-          </p:cNvPicPr>
-          <p:nvPr/>
-        </p:nvPicPr>
-        <p:blipFill>
-          <a:blip r:embed="rId5"/>
-          <a:stretch>
-            <a:fillRect/>
-          </a:stretch>
-        </p:blipFill>
-        <p:spPr>
-          <a:xfrm>
-            <a:off x="4444603" y="8858250"/>
-            <a:ext cx="1493043" cy="2857500"/>
-          </a:xfrm>
-          <a:prstGeom prst="rect">
-            <a:avLst/>
-          </a:prstGeom>
-        </p:spPr>
-      </p:pic>
-      <p:pic>
-        <p:nvPicPr>
-          <p:cNvPr id="7" name="Picture 6" descr="td-dried-flowers-1-1.png"/>
-          <p:cNvPicPr>
-            <a:picLocks noChangeAspect="1"/>
-          </p:cNvPicPr>
-          <p:nvPr/>
-        </p:nvPicPr>
-        <p:blipFill>
-          <a:blip r:embed="rId6"/>
-          <a:stretch>
-            <a:fillRect/>
-          </a:stretch>
-        </p:blipFill>
-        <p:spPr>
-          <a:xfrm>
-            <a:off x="6191250" y="9242322"/>
-            <a:ext cx="1619250" cy="2089354"/>
-          </a:xfrm>
-          <a:prstGeom prst="rect">
-            <a:avLst/>
-          </a:prstGeom>
-        </p:spPr>
-      </p:pic>
-      <p:pic>
-        <p:nvPicPr>
-          <p:cNvPr id="8" name="Picture 7" descr="foundation-logo-white.png"/>
-          <p:cNvPicPr>
-            <a:picLocks noChangeAspect="1"/>
-          </p:cNvPicPr>
-          <p:nvPr/>
-        </p:nvPicPr>
-        <p:blipFill>
-          <a:blip r:embed="rId7"/>
-          <a:stretch>
-            <a:fillRect/>
-          </a:stretch>
-        </p:blipFill>
-        <p:spPr>
-          <a:xfrm>
-            <a:off x="8477250" y="11250012"/>
-            <a:ext cx="1047750" cy="941987"/>
-          </a:xfrm>
-          <a:prstGeom prst="rect">
-            <a:avLst/>
-          </a:prstGeom>
-        </p:spPr>
-      </p:pic>
-    </p:spTree>
-  </p:cSld>
-  <p:clrMapOvr>
-    <a:masterClrMapping/>
-  </p:clrMapOvr>
-</p:sld>
-</file>
-
 <file path=ppt/slides/slide2.xml><?xml version="1.0" encoding="utf-8"?>
 <p:sld xmlns:a="http://schemas.openxmlformats.org/drawingml/2006/main" xmlns:p="http://schemas.openxmlformats.org/presentationml/2006/main" xmlns:r="http://schemas.openxmlformats.org/officeDocument/2006/relationships">
   <p:cSld>
@@ -6603,7 +4380,7 @@
         <p:spPr>
           <a:xfrm>
             <a:off x="762000" y="762000"/>
-            <a:ext cx="8763000" cy="7810500"/>
+            <a:ext cx="3810000" cy="4953000"/>
           </a:xfrm>
           <a:prstGeom prst="rect">
             <a:avLst/>
@@ -6654,17 +4431,150 @@
         </p:blipFill>
         <p:spPr>
           <a:xfrm>
-            <a:off x="1111329" y="1143000"/>
-            <a:ext cx="3682841" cy="7048500"/>
+            <a:off x="1870709" y="1333500"/>
+            <a:ext cx="1592580" cy="3048000"/>
           </a:xfrm>
           <a:prstGeom prst="rect">
             <a:avLst/>
           </a:prstGeom>
         </p:spPr>
       </p:pic>
+      <p:sp>
+        <p:nvSpPr>
+          <p:cNvPr id="4" name="TextBox 3"/>
+          <p:cNvSpPr txBox="1"/>
+          <p:nvPr/>
+        </p:nvSpPr>
+        <p:spPr>
+          <a:xfrm>
+            <a:off x="762000" y="4667250"/>
+            <a:ext cx="3810000" cy="762000"/>
+          </a:xfrm>
+          <a:prstGeom prst="rect">
+            <a:avLst/>
+          </a:prstGeom>
+          <a:noFill/>
+        </p:spPr>
+        <p:txBody>
+          <a:bodyPr wrap="square" lIns="0" rIns="0" tIns="0" bIns="0" anchor="t">
+            <a:spAutoFit/>
+          </a:bodyPr>
+          <a:lstStyle/>
+          <a:p>
+            <a:pPr algn="ctr">
+              <a:lnSpc>
+                <a:spcPct val="120000"/>
+              </a:lnSpc>
+            </a:pPr>
+            <a:r>
+              <a:rPr sz="1800" b="1" i="0">
+                <a:solidFill>
+                  <a:srgbClr val="8A8577"/>
+                </a:solidFill>
+                <a:latin typeface="Montserrat"/>
+              </a:rPr>
+              <a:t>PHOTO NEEDED</a:t>
+            </a:r>
+          </a:p>
+          <a:p>
+            <a:pPr algn="ctr">
+              <a:lnSpc>
+                <a:spcPct val="120000"/>
+              </a:lnSpc>
+            </a:pPr>
+            <a:r>
+              <a:rPr sz="1800" b="1" i="0">
+                <a:solidFill>
+                  <a:srgbClr val="8A8577"/>
+                </a:solidFill>
+                <a:latin typeface="Montserrat"/>
+              </a:rPr>
+              <a:t>Tommy Tepper</a:t>
+            </a:r>
+          </a:p>
+        </p:txBody>
+      </p:sp>
+      <p:sp>
+        <p:nvSpPr>
+          <p:cNvPr id="5" name="TextBox 4"/>
+          <p:cNvSpPr txBox="1"/>
+          <p:nvPr/>
+        </p:nvSpPr>
+        <p:spPr>
+          <a:xfrm>
+            <a:off x="4953000" y="857250"/>
+            <a:ext cx="4572000" cy="630160"/>
+          </a:xfrm>
+          <a:prstGeom prst="rect">
+            <a:avLst/>
+          </a:prstGeom>
+          <a:noFill/>
+        </p:spPr>
+        <p:txBody>
+          <a:bodyPr wrap="square" lIns="0" rIns="0" tIns="0" bIns="0" anchor="t">
+            <a:spAutoFit/>
+          </a:bodyPr>
+          <a:lstStyle/>
+          <a:p>
+            <a:pPr algn="l">
+              <a:lnSpc>
+                <a:spcPct val="100000"/>
+              </a:lnSpc>
+            </a:pPr>
+            <a:r>
+              <a:rPr sz="3600" b="1" i="0">
+                <a:solidFill>
+                  <a:srgbClr val="31662F"/>
+                </a:solidFill>
+                <a:latin typeface="Montserrat"/>
+              </a:rPr>
+              <a:t>Tommy Tepper</a:t>
+            </a:r>
+          </a:p>
+        </p:txBody>
+      </p:sp>
+      <p:sp>
+        <p:nvSpPr>
+          <p:cNvPr id="6" name="TextBox 5"/>
+          <p:cNvSpPr txBox="1"/>
+          <p:nvPr/>
+        </p:nvSpPr>
+        <p:spPr>
+          <a:xfrm>
+            <a:off x="4953000" y="1449310"/>
+            <a:ext cx="4572000" cy="402823"/>
+          </a:xfrm>
+          <a:prstGeom prst="rect">
+            <a:avLst/>
+          </a:prstGeom>
+          <a:noFill/>
+        </p:spPr>
+        <p:txBody>
+          <a:bodyPr wrap="square" lIns="0" rIns="0" tIns="0" bIns="0" anchor="t">
+            <a:spAutoFit/>
+          </a:bodyPr>
+          <a:lstStyle/>
+          <a:p>
+            <a:pPr algn="l">
+              <a:lnSpc>
+                <a:spcPct val="115000"/>
+              </a:lnSpc>
+            </a:pPr>
+            <a:r>
+              <a:rPr sz="1800" b="0" i="0">
+                <a:solidFill>
+                  <a:srgbClr val="1A1A1A"/>
+                </a:solidFill>
+                <a:latin typeface="Source Sans 3"/>
+              </a:rPr>
+              <a:t>Director of Education &amp; Mentor</a:t>
+            </a:r>
+          </a:p>
+        </p:txBody>
+      </p:sp>
       <p:pic>
         <p:nvPicPr>
-          <p:cNvPr id="4" name="Picture 3" descr="td-leaf-sprig-paper-1.png"/>
+          <p:cNvPr id="7" name="Picture 6" descr="7414123442854527377.jpg"/>
           <p:cNvPicPr>
             <a:picLocks noChangeAspect="1"/>
           </p:cNvPicPr>
@@ -6678,8 +4588,8 @@
         </p:blipFill>
         <p:spPr>
           <a:xfrm>
-            <a:off x="5334000" y="1466850"/>
-            <a:ext cx="4000500" cy="6400800"/>
+            <a:off x="762000" y="6477000"/>
+            <a:ext cx="3810000" cy="4953000"/>
           </a:xfrm>
           <a:prstGeom prst="rect">
             <a:avLst/>
@@ -6688,14 +4598,14 @@
       </p:pic>
       <p:sp>
         <p:nvSpPr>
-          <p:cNvPr id="5" name="TextBox 4"/>
+          <p:cNvPr id="8" name="TextBox 7"/>
           <p:cNvSpPr txBox="1"/>
           <p:nvPr/>
         </p:nvSpPr>
         <p:spPr>
           <a:xfrm>
-            <a:off x="762000" y="8896350"/>
-            <a:ext cx="8763000" cy="838181"/>
+            <a:off x="4953000" y="6572250"/>
+            <a:ext cx="4572000" cy="630160"/>
           </a:xfrm>
           <a:prstGeom prst="rect">
             <a:avLst/>
@@ -6714,27 +4624,27 @@
               </a:lnSpc>
             </a:pPr>
             <a:r>
-              <a:rPr sz="5000" b="1" i="0">
+              <a:rPr sz="3600" b="1" i="0">
                 <a:solidFill>
                   <a:srgbClr val="31662F"/>
                 </a:solidFill>
                 <a:latin typeface="Montserrat"/>
               </a:rPr>
-              <a:t>Tommy Tepper</a:t>
-            </a:r>
-          </a:p>
-        </p:txBody>
-      </p:sp>
-      <p:sp>
-        <p:nvSpPr>
-          <p:cNvPr id="6" name="TextBox 5"/>
+              <a:t>Loida Vasquez</a:t>
+            </a:r>
+          </a:p>
+        </p:txBody>
+      </p:sp>
+      <p:sp>
+        <p:nvSpPr>
+          <p:cNvPr id="9" name="TextBox 8"/>
           <p:cNvSpPr txBox="1"/>
           <p:nvPr/>
         </p:nvSpPr>
         <p:spPr>
           <a:xfrm>
-            <a:off x="762000" y="9696431"/>
-            <a:ext cx="8763000" cy="471173"/>
+            <a:off x="4953000" y="7164310"/>
+            <a:ext cx="4572000" cy="402823"/>
           </a:xfrm>
           <a:prstGeom prst="rect">
             <a:avLst/>
@@ -6753,26 +4663,70 @@
               </a:lnSpc>
             </a:pPr>
             <a:r>
-              <a:rPr sz="2200" b="0" i="0">
+              <a:rPr sz="1800" b="0" i="0">
                 <a:solidFill>
                   <a:srgbClr val="1A1A1A"/>
                 </a:solidFill>
                 <a:latin typeface="Source Sans 3"/>
               </a:rPr>
-              <a:t>Director of Education &amp; Mentor</a:t>
-            </a:r>
-          </a:p>
-        </p:txBody>
-      </p:sp>
-      <p:sp>
-        <p:nvSpPr>
-          <p:cNvPr id="7" name="TextBox 6"/>
+              <a:t>Advanced Programs Lead &amp; Mentor</a:t>
+            </a:r>
+          </a:p>
+        </p:txBody>
+      </p:sp>
+      <p:sp>
+        <p:nvSpPr>
+          <p:cNvPr id="10" name="Rectangle 9"/>
+          <p:cNvSpPr/>
+          <p:nvPr/>
+        </p:nvSpPr>
+        <p:spPr>
+          <a:xfrm>
+            <a:off x="762000" y="6096000"/>
+            <a:ext cx="8763000" cy="19050"/>
+          </a:xfrm>
+          <a:prstGeom prst="rect">
+            <a:avLst/>
+          </a:prstGeom>
+          <a:solidFill>
+            <a:srgbClr val="B1BCB1"/>
+          </a:solidFill>
+          <a:ln>
+            <a:noFill/>
+          </a:ln>
+          <a:effectLst/>
+        </p:spPr>
+        <p:style>
+          <a:lnRef idx="1">
+            <a:schemeClr val="accent1"/>
+          </a:lnRef>
+          <a:fillRef idx="3">
+            <a:schemeClr val="accent1"/>
+          </a:fillRef>
+          <a:effectRef idx="2">
+            <a:schemeClr val="accent1"/>
+          </a:effectRef>
+          <a:fontRef idx="minor">
+            <a:schemeClr val="lt1"/>
+          </a:fontRef>
+        </p:style>
+        <p:txBody>
+          <a:bodyPr rtlCol="0" anchor="ctr"/>
+          <a:lstStyle/>
+          <a:p>
+            <a:pPr algn="ctr"/>
+          </a:p>
+        </p:txBody>
+      </p:sp>
+      <p:sp>
+        <p:nvSpPr>
+          <p:cNvPr id="11" name="TextBox 10"/>
           <p:cNvSpPr txBox="1"/>
           <p:nvPr/>
         </p:nvSpPr>
         <p:spPr>
           <a:xfrm>
-            <a:off x="6667500" y="12192000"/>
+            <a:off x="6667500" y="12287250"/>
             <a:ext cx="2857500" cy="285750"/>
           </a:xfrm>
           <a:prstGeom prst="rect">
@@ -6831,7 +4785,7 @@
       <p:grpSpPr/>
       <p:pic>
         <p:nvPicPr>
-          <p:cNvPr id="2" name="Picture 1" descr="7201349381947070333.jpg"/>
+          <p:cNvPr id="2" name="Picture 1" descr="883093184264385181.jpg"/>
           <p:cNvPicPr>
             <a:picLocks noChangeAspect="1"/>
           </p:cNvPicPr>
@@ -6846,16 +4800,172 @@
         <p:spPr>
           <a:xfrm>
             <a:off x="762000" y="762000"/>
-            <a:ext cx="8763000" cy="5334000"/>
+            <a:ext cx="3810000" cy="4953000"/>
           </a:xfrm>
           <a:prstGeom prst="rect">
             <a:avLst/>
           </a:prstGeom>
         </p:spPr>
       </p:pic>
+      <p:sp>
+        <p:nvSpPr>
+          <p:cNvPr id="3" name="TextBox 2"/>
+          <p:cNvSpPr txBox="1"/>
+          <p:nvPr/>
+        </p:nvSpPr>
+        <p:spPr>
+          <a:xfrm>
+            <a:off x="4953000" y="857250"/>
+            <a:ext cx="4572000" cy="630160"/>
+          </a:xfrm>
+          <a:prstGeom prst="rect">
+            <a:avLst/>
+          </a:prstGeom>
+          <a:noFill/>
+        </p:spPr>
+        <p:txBody>
+          <a:bodyPr wrap="square" lIns="0" rIns="0" tIns="0" bIns="0" anchor="t">
+            <a:spAutoFit/>
+          </a:bodyPr>
+          <a:lstStyle/>
+          <a:p>
+            <a:pPr algn="l">
+              <a:lnSpc>
+                <a:spcPct val="100000"/>
+              </a:lnSpc>
+            </a:pPr>
+            <a:r>
+              <a:rPr sz="3600" b="1" i="0">
+                <a:solidFill>
+                  <a:srgbClr val="31662F"/>
+                </a:solidFill>
+                <a:latin typeface="Montserrat"/>
+              </a:rPr>
+              <a:t>Dr. Carla Portugal</a:t>
+            </a:r>
+          </a:p>
+        </p:txBody>
+      </p:sp>
+      <p:sp>
+        <p:nvSpPr>
+          <p:cNvPr id="4" name="TextBox 3"/>
+          <p:cNvSpPr txBox="1"/>
+          <p:nvPr/>
+        </p:nvSpPr>
+        <p:spPr>
+          <a:xfrm>
+            <a:off x="4953000" y="1449310"/>
+            <a:ext cx="4572000" cy="402823"/>
+          </a:xfrm>
+          <a:prstGeom prst="rect">
+            <a:avLst/>
+          </a:prstGeom>
+          <a:noFill/>
+        </p:spPr>
+        <p:txBody>
+          <a:bodyPr wrap="square" lIns="0" rIns="0" tIns="0" bIns="0" anchor="t">
+            <a:spAutoFit/>
+          </a:bodyPr>
+          <a:lstStyle/>
+          <a:p>
+            <a:pPr algn="l">
+              <a:lnSpc>
+                <a:spcPct val="115000"/>
+              </a:lnSpc>
+            </a:pPr>
+            <a:r>
+              <a:rPr sz="1800" b="0" i="0">
+                <a:solidFill>
+                  <a:srgbClr val="1A1A1A"/>
+                </a:solidFill>
+                <a:latin typeface="Source Sans 3"/>
+              </a:rPr>
+              <a:t>Science Lead &amp; Mentor</a:t>
+            </a:r>
+          </a:p>
+        </p:txBody>
+      </p:sp>
+      <p:sp>
+        <p:nvSpPr>
+          <p:cNvPr id="5" name="TextBox 4"/>
+          <p:cNvSpPr txBox="1"/>
+          <p:nvPr/>
+        </p:nvSpPr>
+        <p:spPr>
+          <a:xfrm>
+            <a:off x="4953000" y="1928334"/>
+            <a:ext cx="4572000" cy="915446"/>
+          </a:xfrm>
+          <a:prstGeom prst="rect">
+            <a:avLst/>
+          </a:prstGeom>
+          <a:noFill/>
+        </p:spPr>
+        <p:txBody>
+          <a:bodyPr wrap="square" lIns="0" rIns="0" tIns="0" bIns="0" anchor="t">
+            <a:spAutoFit/>
+          </a:bodyPr>
+          <a:lstStyle/>
+          <a:p>
+            <a:pPr algn="l">
+              <a:lnSpc>
+                <a:spcPct val="115000"/>
+              </a:lnSpc>
+            </a:pPr>
+            <a:r>
+              <a:rPr sz="2400" b="0" i="1">
+                <a:solidFill>
+                  <a:srgbClr val="1A1A1A"/>
+                </a:solidFill>
+                <a:latin typeface="EB Garamond"/>
+              </a:rPr>
+              <a:t>“Bare soil erodes. Living roots and cover hold the aggregates together.”</a:t>
+            </a:r>
+          </a:p>
+        </p:txBody>
+      </p:sp>
+      <p:sp>
+        <p:nvSpPr>
+          <p:cNvPr id="6" name="TextBox 5"/>
+          <p:cNvSpPr txBox="1"/>
+          <p:nvPr/>
+        </p:nvSpPr>
+        <p:spPr>
+          <a:xfrm>
+            <a:off x="4953000" y="2862830"/>
+            <a:ext cx="4572000" cy="1069233"/>
+          </a:xfrm>
+          <a:prstGeom prst="rect">
+            <a:avLst/>
+          </a:prstGeom>
+          <a:noFill/>
+        </p:spPr>
+        <p:txBody>
+          <a:bodyPr wrap="square" lIns="0" rIns="0" tIns="0" bIns="0" anchor="t">
+            <a:spAutoFit/>
+          </a:bodyPr>
+          <a:lstStyle/>
+          <a:p>
+            <a:pPr algn="l">
+              <a:lnSpc>
+                <a:spcPct val="115000"/>
+              </a:lnSpc>
+            </a:pPr>
+            <a:r>
+              <a:rPr sz="1900" b="0" i="0">
+                <a:solidFill>
+                  <a:srgbClr val="31662F"/>
+                </a:solidFill>
+                <a:latin typeface="Source Sans 3"/>
+              </a:rPr>
+              <a:t>PhD in Environmental Sciences. 20 years of environmental and farm consulting. Mentoring since 2019.</a:t>
+            </a:r>
+          </a:p>
+        </p:txBody>
+      </p:sp>
       <p:pic>
         <p:nvPicPr>
-          <p:cNvPr id="3" name="Picture 2" descr="td-dried-flowers-1-1.png"/>
+          <p:cNvPr id="7" name="Picture 6" descr="6570009324553209515.jpg"/>
           <p:cNvPicPr>
             <a:picLocks noChangeAspect="1"/>
           </p:cNvPicPr>
@@ -6869,8 +4979,8 @@
         </p:blipFill>
         <p:spPr>
           <a:xfrm>
-            <a:off x="8096250" y="5003697"/>
-            <a:ext cx="1619250" cy="2089354"/>
+            <a:off x="762000" y="6477000"/>
+            <a:ext cx="3810000" cy="4953000"/>
           </a:xfrm>
           <a:prstGeom prst="rect">
             <a:avLst/>
@@ -6879,14 +4989,14 @@
       </p:pic>
       <p:sp>
         <p:nvSpPr>
-          <p:cNvPr id="4" name="TextBox 3"/>
+          <p:cNvPr id="8" name="TextBox 7"/>
           <p:cNvSpPr txBox="1"/>
           <p:nvPr/>
         </p:nvSpPr>
         <p:spPr>
           <a:xfrm>
-            <a:off x="762000" y="6419850"/>
-            <a:ext cx="8763000" cy="838181"/>
+            <a:off x="4953000" y="6572250"/>
+            <a:ext cx="4572000" cy="630160"/>
           </a:xfrm>
           <a:prstGeom prst="rect">
             <a:avLst/>
@@ -6905,27 +5015,27 @@
               </a:lnSpc>
             </a:pPr>
             <a:r>
-              <a:rPr sz="5000" b="1" i="0">
+              <a:rPr sz="3600" b="1" i="0">
                 <a:solidFill>
                   <a:srgbClr val="31662F"/>
                 </a:solidFill>
                 <a:latin typeface="Montserrat"/>
               </a:rPr>
-              <a:t>Loida Vasquez</a:t>
-            </a:r>
-          </a:p>
-        </p:txBody>
-      </p:sp>
-      <p:sp>
-        <p:nvSpPr>
-          <p:cNvPr id="5" name="TextBox 4"/>
+              <a:t>Wesley Sanders</a:t>
+            </a:r>
+          </a:p>
+        </p:txBody>
+      </p:sp>
+      <p:sp>
+        <p:nvSpPr>
+          <p:cNvPr id="9" name="TextBox 8"/>
           <p:cNvSpPr txBox="1"/>
           <p:nvPr/>
         </p:nvSpPr>
         <p:spPr>
           <a:xfrm>
-            <a:off x="762000" y="7219931"/>
-            <a:ext cx="8763000" cy="471173"/>
+            <a:off x="4953000" y="7164310"/>
+            <a:ext cx="4572000" cy="402823"/>
           </a:xfrm>
           <a:prstGeom prst="rect">
             <a:avLst/>
@@ -6944,26 +5054,148 @@
               </a:lnSpc>
             </a:pPr>
             <a:r>
-              <a:rPr sz="2200" b="0" i="0">
+              <a:rPr sz="1800" b="0" i="0">
                 <a:solidFill>
                   <a:srgbClr val="1A1A1A"/>
                 </a:solidFill>
                 <a:latin typeface="Source Sans 3"/>
               </a:rPr>
-              <a:t>Advanced Programs Lead &amp; Mentor</a:t>
-            </a:r>
-          </a:p>
-        </p:txBody>
-      </p:sp>
-      <p:sp>
-        <p:nvSpPr>
-          <p:cNvPr id="6" name="TextBox 5"/>
+              <a:t>Advanced Programs Mentor</a:t>
+            </a:r>
+          </a:p>
+        </p:txBody>
+      </p:sp>
+      <p:sp>
+        <p:nvSpPr>
+          <p:cNvPr id="10" name="TextBox 9"/>
           <p:cNvSpPr txBox="1"/>
           <p:nvPr/>
         </p:nvSpPr>
         <p:spPr>
           <a:xfrm>
-            <a:off x="6667500" y="12192000"/>
+            <a:off x="4953000" y="7643334"/>
+            <a:ext cx="4572000" cy="1325544"/>
+          </a:xfrm>
+          <a:prstGeom prst="rect">
+            <a:avLst/>
+          </a:prstGeom>
+          <a:noFill/>
+        </p:spPr>
+        <p:txBody>
+          <a:bodyPr wrap="square" lIns="0" rIns="0" tIns="0" bIns="0" anchor="t">
+            <a:spAutoFit/>
+          </a:bodyPr>
+          <a:lstStyle/>
+          <a:p>
+            <a:pPr algn="l">
+              <a:lnSpc>
+                <a:spcPct val="115000"/>
+              </a:lnSpc>
+            </a:pPr>
+            <a:r>
+              <a:rPr sz="2400" b="0" i="1">
+                <a:solidFill>
+                  <a:srgbClr val="1A1A1A"/>
+                </a:solidFill>
+                <a:latin typeface="EB Garamond"/>
+              </a:rPr>
+              <a:t>“Compost can look finished and still lack the biology you need. Check it under the microscope before you apply it.”</a:t>
+            </a:r>
+          </a:p>
+        </p:txBody>
+      </p:sp>
+      <p:sp>
+        <p:nvSpPr>
+          <p:cNvPr id="11" name="TextBox 10"/>
+          <p:cNvSpPr txBox="1"/>
+          <p:nvPr/>
+        </p:nvSpPr>
+        <p:spPr>
+          <a:xfrm>
+            <a:off x="4953000" y="8987928"/>
+            <a:ext cx="4572000" cy="1393894"/>
+          </a:xfrm>
+          <a:prstGeom prst="rect">
+            <a:avLst/>
+          </a:prstGeom>
+          <a:noFill/>
+        </p:spPr>
+        <p:txBody>
+          <a:bodyPr wrap="square" lIns="0" rIns="0" tIns="0" bIns="0" anchor="t">
+            <a:spAutoFit/>
+          </a:bodyPr>
+          <a:lstStyle/>
+          <a:p>
+            <a:pPr algn="l">
+              <a:lnSpc>
+                <a:spcPct val="115000"/>
+              </a:lnSpc>
+            </a:pPr>
+            <a:r>
+              <a:rPr sz="1900" b="0" i="0">
+                <a:solidFill>
+                  <a:srgbClr val="31662F"/>
+                </a:solidFill>
+                <a:latin typeface="Source Sans 3"/>
+              </a:rPr>
+              <a:t>A farmer and agricultural journalist, then our first lab tech. Runs Foothill Biological Soil Health Services in California's Sierra Nevada foothills.</a:t>
+            </a:r>
+          </a:p>
+        </p:txBody>
+      </p:sp>
+      <p:sp>
+        <p:nvSpPr>
+          <p:cNvPr id="12" name="Rectangle 11"/>
+          <p:cNvSpPr/>
+          <p:nvPr/>
+        </p:nvSpPr>
+        <p:spPr>
+          <a:xfrm>
+            <a:off x="762000" y="6096000"/>
+            <a:ext cx="8763000" cy="19050"/>
+          </a:xfrm>
+          <a:prstGeom prst="rect">
+            <a:avLst/>
+          </a:prstGeom>
+          <a:solidFill>
+            <a:srgbClr val="B1BCB1"/>
+          </a:solidFill>
+          <a:ln>
+            <a:noFill/>
+          </a:ln>
+          <a:effectLst/>
+        </p:spPr>
+        <p:style>
+          <a:lnRef idx="1">
+            <a:schemeClr val="accent1"/>
+          </a:lnRef>
+          <a:fillRef idx="3">
+            <a:schemeClr val="accent1"/>
+          </a:fillRef>
+          <a:effectRef idx="2">
+            <a:schemeClr val="accent1"/>
+          </a:effectRef>
+          <a:fontRef idx="minor">
+            <a:schemeClr val="lt1"/>
+          </a:fontRef>
+        </p:style>
+        <p:txBody>
+          <a:bodyPr rtlCol="0" anchor="ctr"/>
+          <a:lstStyle/>
+          <a:p>
+            <a:pPr algn="ctr"/>
+          </a:p>
+        </p:txBody>
+      </p:sp>
+      <p:sp>
+        <p:nvSpPr>
+          <p:cNvPr id="13" name="TextBox 12"/>
+          <p:cNvSpPr txBox="1"/>
+          <p:nvPr/>
+        </p:nvSpPr>
+        <p:spPr>
+          <a:xfrm>
+            <a:off x="6667500" y="12287250"/>
             <a:ext cx="2857500" cy="285750"/>
           </a:xfrm>
           <a:prstGeom prst="rect">
@@ -7020,9 +5252,53 @@
         <p:nvPr/>
       </p:nvGrpSpPr>
       <p:grpSpPr/>
+      <p:sp>
+        <p:nvSpPr>
+          <p:cNvPr id="2" name="Rectangle 1"/>
+          <p:cNvSpPr/>
+          <p:nvPr/>
+        </p:nvSpPr>
+        <p:spPr>
+          <a:xfrm>
+            <a:off x="762000" y="762000"/>
+            <a:ext cx="3810000" cy="4953000"/>
+          </a:xfrm>
+          <a:prstGeom prst="rect">
+            <a:avLst/>
+          </a:prstGeom>
+          <a:solidFill>
+            <a:srgbClr val="E4E6DC"/>
+          </a:solidFill>
+          <a:ln>
+            <a:noFill/>
+          </a:ln>
+          <a:effectLst/>
+        </p:spPr>
+        <p:style>
+          <a:lnRef idx="1">
+            <a:schemeClr val="accent1"/>
+          </a:lnRef>
+          <a:fillRef idx="3">
+            <a:schemeClr val="accent1"/>
+          </a:fillRef>
+          <a:effectRef idx="2">
+            <a:schemeClr val="accent1"/>
+          </a:effectRef>
+          <a:fontRef idx="minor">
+            <a:schemeClr val="lt1"/>
+          </a:fontRef>
+        </p:style>
+        <p:txBody>
+          <a:bodyPr rtlCol="0" anchor="ctr"/>
+          <a:lstStyle/>
+          <a:p>
+            <a:pPr algn="ctr"/>
+          </a:p>
+        </p:txBody>
+      </p:sp>
       <p:pic>
         <p:nvPicPr>
-          <p:cNvPr id="2" name="Picture 1" descr="366407989559052018.jpg"/>
+          <p:cNvPr id="3" name="Picture 2" descr="td-happy-seedling-1.png"/>
           <p:cNvPicPr>
             <a:picLocks noChangeAspect="1"/>
           </p:cNvPicPr>
@@ -7036,17 +5312,233 @@
         </p:blipFill>
         <p:spPr>
           <a:xfrm>
-            <a:off x="762000" y="762000"/>
-            <a:ext cx="8763000" cy="5334000"/>
+            <a:off x="1714500" y="1785770"/>
+            <a:ext cx="1905000" cy="2143459"/>
           </a:xfrm>
           <a:prstGeom prst="rect">
             <a:avLst/>
           </a:prstGeom>
         </p:spPr>
       </p:pic>
+      <p:sp>
+        <p:nvSpPr>
+          <p:cNvPr id="4" name="TextBox 3"/>
+          <p:cNvSpPr txBox="1"/>
+          <p:nvPr/>
+        </p:nvSpPr>
+        <p:spPr>
+          <a:xfrm>
+            <a:off x="762000" y="4667250"/>
+            <a:ext cx="3810000" cy="762000"/>
+          </a:xfrm>
+          <a:prstGeom prst="rect">
+            <a:avLst/>
+          </a:prstGeom>
+          <a:noFill/>
+        </p:spPr>
+        <p:txBody>
+          <a:bodyPr wrap="square" lIns="0" rIns="0" tIns="0" bIns="0" anchor="t">
+            <a:spAutoFit/>
+          </a:bodyPr>
+          <a:lstStyle/>
+          <a:p>
+            <a:pPr algn="ctr">
+              <a:lnSpc>
+                <a:spcPct val="120000"/>
+              </a:lnSpc>
+            </a:pPr>
+            <a:r>
+              <a:rPr sz="1800" b="1" i="0">
+                <a:solidFill>
+                  <a:srgbClr val="8A8577"/>
+                </a:solidFill>
+                <a:latin typeface="Montserrat"/>
+              </a:rPr>
+              <a:t>PHOTO NEEDED</a:t>
+            </a:r>
+          </a:p>
+          <a:p>
+            <a:pPr algn="ctr">
+              <a:lnSpc>
+                <a:spcPct val="120000"/>
+              </a:lnSpc>
+            </a:pPr>
+            <a:r>
+              <a:rPr sz="1800" b="1" i="0">
+                <a:solidFill>
+                  <a:srgbClr val="8A8577"/>
+                </a:solidFill>
+                <a:latin typeface="Montserrat"/>
+              </a:rPr>
+              <a:t>Casey Williams</a:t>
+            </a:r>
+          </a:p>
+        </p:txBody>
+      </p:sp>
+      <p:sp>
+        <p:nvSpPr>
+          <p:cNvPr id="5" name="TextBox 4"/>
+          <p:cNvSpPr txBox="1"/>
+          <p:nvPr/>
+        </p:nvSpPr>
+        <p:spPr>
+          <a:xfrm>
+            <a:off x="4953000" y="857250"/>
+            <a:ext cx="4572000" cy="630160"/>
+          </a:xfrm>
+          <a:prstGeom prst="rect">
+            <a:avLst/>
+          </a:prstGeom>
+          <a:noFill/>
+        </p:spPr>
+        <p:txBody>
+          <a:bodyPr wrap="square" lIns="0" rIns="0" tIns="0" bIns="0" anchor="t">
+            <a:spAutoFit/>
+          </a:bodyPr>
+          <a:lstStyle/>
+          <a:p>
+            <a:pPr algn="l">
+              <a:lnSpc>
+                <a:spcPct val="100000"/>
+              </a:lnSpc>
+            </a:pPr>
+            <a:r>
+              <a:rPr sz="3600" b="1" i="0">
+                <a:solidFill>
+                  <a:srgbClr val="31662F"/>
+                </a:solidFill>
+                <a:latin typeface="Montserrat"/>
+              </a:rPr>
+              <a:t>Casey Williams</a:t>
+            </a:r>
+          </a:p>
+        </p:txBody>
+      </p:sp>
+      <p:sp>
+        <p:nvSpPr>
+          <p:cNvPr id="6" name="TextBox 5"/>
+          <p:cNvSpPr txBox="1"/>
+          <p:nvPr/>
+        </p:nvSpPr>
+        <p:spPr>
+          <a:xfrm>
+            <a:off x="4953000" y="1449310"/>
+            <a:ext cx="4572000" cy="402823"/>
+          </a:xfrm>
+          <a:prstGeom prst="rect">
+            <a:avLst/>
+          </a:prstGeom>
+          <a:noFill/>
+        </p:spPr>
+        <p:txBody>
+          <a:bodyPr wrap="square" lIns="0" rIns="0" tIns="0" bIns="0" anchor="t">
+            <a:spAutoFit/>
+          </a:bodyPr>
+          <a:lstStyle/>
+          <a:p>
+            <a:pPr algn="l">
+              <a:lnSpc>
+                <a:spcPct val="115000"/>
+              </a:lnSpc>
+            </a:pPr>
+            <a:r>
+              <a:rPr sz="1800" b="0" i="0">
+                <a:solidFill>
+                  <a:srgbClr val="1A1A1A"/>
+                </a:solidFill>
+                <a:latin typeface="Source Sans 3"/>
+              </a:rPr>
+              <a:t>Advanced Programs Mentor</a:t>
+            </a:r>
+          </a:p>
+        </p:txBody>
+      </p:sp>
+      <p:sp>
+        <p:nvSpPr>
+          <p:cNvPr id="7" name="TextBox 6"/>
+          <p:cNvSpPr txBox="1"/>
+          <p:nvPr/>
+        </p:nvSpPr>
+        <p:spPr>
+          <a:xfrm>
+            <a:off x="4953000" y="1928334"/>
+            <a:ext cx="4572000" cy="1069233"/>
+          </a:xfrm>
+          <a:prstGeom prst="rect">
+            <a:avLst/>
+          </a:prstGeom>
+          <a:noFill/>
+        </p:spPr>
+        <p:txBody>
+          <a:bodyPr wrap="square" lIns="0" rIns="0" tIns="0" bIns="0" anchor="t">
+            <a:spAutoFit/>
+          </a:bodyPr>
+          <a:lstStyle/>
+          <a:p>
+            <a:pPr algn="l">
+              <a:lnSpc>
+                <a:spcPct val="115000"/>
+              </a:lnSpc>
+            </a:pPr>
+            <a:r>
+              <a:rPr sz="1900" b="0" i="0">
+                <a:solidFill>
+                  <a:srgbClr val="1A1A1A"/>
+                </a:solidFill>
+                <a:latin typeface="Source Sans 3"/>
+              </a:rPr>
+              <a:t>Around ten years of farming and gardening. A long-time student, now teaching. Favourite microbe: rotifers.</a:t>
+            </a:r>
+          </a:p>
+        </p:txBody>
+      </p:sp>
+      <p:sp>
+        <p:nvSpPr>
+          <p:cNvPr id="8" name="Rectangle 7"/>
+          <p:cNvSpPr/>
+          <p:nvPr/>
+        </p:nvSpPr>
+        <p:spPr>
+          <a:xfrm>
+            <a:off x="762000" y="6477000"/>
+            <a:ext cx="3810000" cy="4953000"/>
+          </a:xfrm>
+          <a:prstGeom prst="rect">
+            <a:avLst/>
+          </a:prstGeom>
+          <a:solidFill>
+            <a:srgbClr val="E4E6DC"/>
+          </a:solidFill>
+          <a:ln>
+            <a:noFill/>
+          </a:ln>
+          <a:effectLst/>
+        </p:spPr>
+        <p:style>
+          <a:lnRef idx="1">
+            <a:schemeClr val="accent1"/>
+          </a:lnRef>
+          <a:fillRef idx="3">
+            <a:schemeClr val="accent1"/>
+          </a:fillRef>
+          <a:effectRef idx="2">
+            <a:schemeClr val="accent1"/>
+          </a:effectRef>
+          <a:fontRef idx="minor">
+            <a:schemeClr val="lt1"/>
+          </a:fontRef>
+        </p:style>
+        <p:txBody>
+          <a:bodyPr rtlCol="0" anchor="ctr"/>
+          <a:lstStyle/>
+          <a:p>
+            <a:pPr algn="ctr"/>
+          </a:p>
+        </p:txBody>
+      </p:sp>
       <p:pic>
         <p:nvPicPr>
-          <p:cNvPr id="3" name="Picture 2" descr="td-dried-flowers-2-1.png"/>
+          <p:cNvPr id="9" name="Picture 8" descr="td-dried-flowers-1-1.png"/>
           <p:cNvPicPr>
             <a:picLocks noChangeAspect="1"/>
           </p:cNvPicPr>
@@ -7060,8 +5552,8 @@
         </p:blipFill>
         <p:spPr>
           <a:xfrm>
-            <a:off x="8178819" y="4953000"/>
-            <a:ext cx="1454110" cy="2190749"/>
+            <a:off x="1714500" y="7343467"/>
+            <a:ext cx="1905000" cy="2458064"/>
           </a:xfrm>
           <a:prstGeom prst="rect">
             <a:avLst/>
@@ -7070,14 +5562,69 @@
       </p:pic>
       <p:sp>
         <p:nvSpPr>
-          <p:cNvPr id="4" name="TextBox 3"/>
+          <p:cNvPr id="10" name="TextBox 9"/>
           <p:cNvSpPr txBox="1"/>
           <p:nvPr/>
         </p:nvSpPr>
         <p:spPr>
           <a:xfrm>
-            <a:off x="762000" y="6419850"/>
-            <a:ext cx="8763000" cy="838181"/>
+            <a:off x="762000" y="10382250"/>
+            <a:ext cx="3810000" cy="762000"/>
+          </a:xfrm>
+          <a:prstGeom prst="rect">
+            <a:avLst/>
+          </a:prstGeom>
+          <a:noFill/>
+        </p:spPr>
+        <p:txBody>
+          <a:bodyPr wrap="square" lIns="0" rIns="0" tIns="0" bIns="0" anchor="t">
+            <a:spAutoFit/>
+          </a:bodyPr>
+          <a:lstStyle/>
+          <a:p>
+            <a:pPr algn="ctr">
+              <a:lnSpc>
+                <a:spcPct val="120000"/>
+              </a:lnSpc>
+            </a:pPr>
+            <a:r>
+              <a:rPr sz="1800" b="1" i="0">
+                <a:solidFill>
+                  <a:srgbClr val="8A8577"/>
+                </a:solidFill>
+                <a:latin typeface="Montserrat"/>
+              </a:rPr>
+              <a:t>PHOTO NEEDED</a:t>
+            </a:r>
+          </a:p>
+          <a:p>
+            <a:pPr algn="ctr">
+              <a:lnSpc>
+                <a:spcPct val="120000"/>
+              </a:lnSpc>
+            </a:pPr>
+            <a:r>
+              <a:rPr sz="1800" b="1" i="0">
+                <a:solidFill>
+                  <a:srgbClr val="8A8577"/>
+                </a:solidFill>
+                <a:latin typeface="Montserrat"/>
+              </a:rPr>
+              <a:t>Brian Daubenspeck</a:t>
+            </a:r>
+          </a:p>
+        </p:txBody>
+      </p:sp>
+      <p:sp>
+        <p:nvSpPr>
+          <p:cNvPr id="11" name="TextBox 10"/>
+          <p:cNvSpPr txBox="1"/>
+          <p:nvPr/>
+        </p:nvSpPr>
+        <p:spPr>
+          <a:xfrm>
+            <a:off x="4953000" y="6572250"/>
+            <a:ext cx="4572000" cy="1165071"/>
           </a:xfrm>
           <a:prstGeom prst="rect">
             <a:avLst/>
@@ -7096,27 +5643,27 @@
               </a:lnSpc>
             </a:pPr>
             <a:r>
-              <a:rPr sz="5000" b="1" i="0">
+              <a:rPr sz="3600" b="1" i="0">
                 <a:solidFill>
                   <a:srgbClr val="31662F"/>
                 </a:solidFill>
                 <a:latin typeface="Montserrat"/>
               </a:rPr>
-              <a:t>Dr. Carla Portugal</a:t>
-            </a:r>
-          </a:p>
-        </p:txBody>
-      </p:sp>
-      <p:sp>
-        <p:nvSpPr>
-          <p:cNvPr id="5" name="TextBox 4"/>
+              <a:t>Brian Daubenspeck</a:t>
+            </a:r>
+          </a:p>
+        </p:txBody>
+      </p:sp>
+      <p:sp>
+        <p:nvSpPr>
+          <p:cNvPr id="12" name="TextBox 11"/>
           <p:cNvSpPr txBox="1"/>
           <p:nvPr/>
         </p:nvSpPr>
         <p:spPr>
           <a:xfrm>
-            <a:off x="762000" y="7219931"/>
-            <a:ext cx="8763000" cy="471173"/>
+            <a:off x="4953000" y="7699221"/>
+            <a:ext cx="4572000" cy="402823"/>
           </a:xfrm>
           <a:prstGeom prst="rect">
             <a:avLst/>
@@ -7135,27 +5682,27 @@
               </a:lnSpc>
             </a:pPr>
             <a:r>
-              <a:rPr sz="2200" b="0" i="0">
+              <a:rPr sz="1800" b="0" i="0">
                 <a:solidFill>
                   <a:srgbClr val="1A1A1A"/>
                 </a:solidFill>
                 <a:latin typeface="Source Sans 3"/>
               </a:rPr>
-              <a:t>Science Lead &amp; Mentor</a:t>
-            </a:r>
-          </a:p>
-        </p:txBody>
-      </p:sp>
-      <p:sp>
-        <p:nvSpPr>
-          <p:cNvPr id="6" name="TextBox 5"/>
+              <a:t>Advanced Programs Mentor</a:t>
+            </a:r>
+          </a:p>
+        </p:txBody>
+      </p:sp>
+      <p:sp>
+        <p:nvSpPr>
+          <p:cNvPr id="13" name="TextBox 12"/>
           <p:cNvSpPr txBox="1"/>
           <p:nvPr/>
         </p:nvSpPr>
         <p:spPr>
           <a:xfrm>
-            <a:off x="762000" y="7843504"/>
-            <a:ext cx="8763000" cy="1393894"/>
+            <a:off x="4953000" y="8178244"/>
+            <a:ext cx="4572000" cy="1069233"/>
           </a:xfrm>
           <a:prstGeom prst="rect">
             <a:avLst/>
@@ -7174,65 +5721,70 @@
               </a:lnSpc>
             </a:pPr>
             <a:r>
-              <a:rPr sz="3800" b="0" i="1">
+              <a:rPr sz="1900" b="0" i="0">
                 <a:solidFill>
                   <a:srgbClr val="1A1A1A"/>
-                </a:solidFill>
-                <a:latin typeface="EB Garamond"/>
-              </a:rPr>
-              <a:t>“Bare soil erodes. Living roots and cover hold the aggregates together.”</a:t>
-            </a:r>
-          </a:p>
-        </p:txBody>
-      </p:sp>
-      <p:sp>
-        <p:nvSpPr>
-          <p:cNvPr id="7" name="TextBox 6"/>
-          <p:cNvSpPr txBox="1"/>
-          <p:nvPr/>
-        </p:nvSpPr>
-        <p:spPr>
-          <a:xfrm>
-            <a:off x="762000" y="9332648"/>
-            <a:ext cx="8763000" cy="983795"/>
-          </a:xfrm>
-          <a:prstGeom prst="rect">
-            <a:avLst/>
-          </a:prstGeom>
-          <a:noFill/>
-        </p:spPr>
-        <p:txBody>
-          <a:bodyPr wrap="square" lIns="0" rIns="0" tIns="0" bIns="0" anchor="t">
-            <a:spAutoFit/>
-          </a:bodyPr>
-          <a:lstStyle/>
-          <a:p>
-            <a:pPr algn="l">
-              <a:lnSpc>
-                <a:spcPct val="115000"/>
-              </a:lnSpc>
-            </a:pPr>
-            <a:r>
-              <a:rPr sz="2600" b="0" i="0">
-                <a:solidFill>
-                  <a:srgbClr val="31662F"/>
                 </a:solidFill>
                 <a:latin typeface="Source Sans 3"/>
               </a:rPr>
-              <a:t>PhD in Environmental Sciences. 20 years of environmental and farm consulting. Mentoring since 2019.</a:t>
-            </a:r>
-          </a:p>
-        </p:txBody>
-      </p:sp>
-      <p:sp>
-        <p:nvSpPr>
-          <p:cNvPr id="8" name="TextBox 7"/>
+              <a:t>Manages orchards in California, after years in New Mexico. Favourite microbes: the small underdogs.</a:t>
+            </a:r>
+          </a:p>
+        </p:txBody>
+      </p:sp>
+      <p:sp>
+        <p:nvSpPr>
+          <p:cNvPr id="14" name="Rectangle 13"/>
+          <p:cNvSpPr/>
+          <p:nvPr/>
+        </p:nvSpPr>
+        <p:spPr>
+          <a:xfrm>
+            <a:off x="762000" y="6096000"/>
+            <a:ext cx="8763000" cy="19050"/>
+          </a:xfrm>
+          <a:prstGeom prst="rect">
+            <a:avLst/>
+          </a:prstGeom>
+          <a:solidFill>
+            <a:srgbClr val="B1BCB1"/>
+          </a:solidFill>
+          <a:ln>
+            <a:noFill/>
+          </a:ln>
+          <a:effectLst/>
+        </p:spPr>
+        <p:style>
+          <a:lnRef idx="1">
+            <a:schemeClr val="accent1"/>
+          </a:lnRef>
+          <a:fillRef idx="3">
+            <a:schemeClr val="accent1"/>
+          </a:fillRef>
+          <a:effectRef idx="2">
+            <a:schemeClr val="accent1"/>
+          </a:effectRef>
+          <a:fontRef idx="minor">
+            <a:schemeClr val="lt1"/>
+          </a:fontRef>
+        </p:style>
+        <p:txBody>
+          <a:bodyPr rtlCol="0" anchor="ctr"/>
+          <a:lstStyle/>
+          <a:p>
+            <a:pPr algn="ctr"/>
+          </a:p>
+        </p:txBody>
+      </p:sp>
+      <p:sp>
+        <p:nvSpPr>
+          <p:cNvPr id="15" name="TextBox 14"/>
           <p:cNvSpPr txBox="1"/>
           <p:nvPr/>
         </p:nvSpPr>
         <p:spPr>
           <a:xfrm>
-            <a:off x="6667500" y="12192000"/>
+            <a:off x="6667500" y="12287250"/>
             <a:ext cx="2857500" cy="285750"/>
           </a:xfrm>
           <a:prstGeom prst="rect">
@@ -7289,9 +5841,53 @@
         <p:nvPr/>
       </p:nvGrpSpPr>
       <p:grpSpPr/>
+      <p:sp>
+        <p:nvSpPr>
+          <p:cNvPr id="2" name="Rectangle 1"/>
+          <p:cNvSpPr/>
+          <p:nvPr/>
+        </p:nvSpPr>
+        <p:spPr>
+          <a:xfrm>
+            <a:off x="762000" y="762000"/>
+            <a:ext cx="3810000" cy="4953000"/>
+          </a:xfrm>
+          <a:prstGeom prst="rect">
+            <a:avLst/>
+          </a:prstGeom>
+          <a:solidFill>
+            <a:srgbClr val="E4E6DC"/>
+          </a:solidFill>
+          <a:ln>
+            <a:noFill/>
+          </a:ln>
+          <a:effectLst/>
+        </p:spPr>
+        <p:style>
+          <a:lnRef idx="1">
+            <a:schemeClr val="accent1"/>
+          </a:lnRef>
+          <a:fillRef idx="3">
+            <a:schemeClr val="accent1"/>
+          </a:fillRef>
+          <a:effectRef idx="2">
+            <a:schemeClr val="accent1"/>
+          </a:effectRef>
+          <a:fontRef idx="minor">
+            <a:schemeClr val="lt1"/>
+          </a:fontRef>
+        </p:style>
+        <p:txBody>
+          <a:bodyPr rtlCol="0" anchor="ctr"/>
+          <a:lstStyle/>
+          <a:p>
+            <a:pPr algn="ctr"/>
+          </a:p>
+        </p:txBody>
+      </p:sp>
       <p:pic>
         <p:nvPicPr>
-          <p:cNvPr id="2" name="Picture 1" descr="5545315227462026067.jpg"/>
+          <p:cNvPr id="3" name="Picture 2" descr="td-dried-flowers-2-1.png"/>
           <p:cNvPicPr>
             <a:picLocks noChangeAspect="1"/>
           </p:cNvPicPr>
@@ -7305,17 +5901,233 @@
         </p:blipFill>
         <p:spPr>
           <a:xfrm>
-            <a:off x="762000" y="762000"/>
-            <a:ext cx="8763000" cy="5334000"/>
+            <a:off x="1714500" y="1422471"/>
+            <a:ext cx="1905000" cy="2870056"/>
           </a:xfrm>
           <a:prstGeom prst="rect">
             <a:avLst/>
           </a:prstGeom>
         </p:spPr>
       </p:pic>
+      <p:sp>
+        <p:nvSpPr>
+          <p:cNvPr id="4" name="TextBox 3"/>
+          <p:cNvSpPr txBox="1"/>
+          <p:nvPr/>
+        </p:nvSpPr>
+        <p:spPr>
+          <a:xfrm>
+            <a:off x="762000" y="4667250"/>
+            <a:ext cx="3810000" cy="762000"/>
+          </a:xfrm>
+          <a:prstGeom prst="rect">
+            <a:avLst/>
+          </a:prstGeom>
+          <a:noFill/>
+        </p:spPr>
+        <p:txBody>
+          <a:bodyPr wrap="square" lIns="0" rIns="0" tIns="0" bIns="0" anchor="t">
+            <a:spAutoFit/>
+          </a:bodyPr>
+          <a:lstStyle/>
+          <a:p>
+            <a:pPr algn="ctr">
+              <a:lnSpc>
+                <a:spcPct val="120000"/>
+              </a:lnSpc>
+            </a:pPr>
+            <a:r>
+              <a:rPr sz="1800" b="1" i="0">
+                <a:solidFill>
+                  <a:srgbClr val="8A8577"/>
+                </a:solidFill>
+                <a:latin typeface="Montserrat"/>
+              </a:rPr>
+              <a:t>PHOTO NEEDED</a:t>
+            </a:r>
+          </a:p>
+          <a:p>
+            <a:pPr algn="ctr">
+              <a:lnSpc>
+                <a:spcPct val="120000"/>
+              </a:lnSpc>
+            </a:pPr>
+            <a:r>
+              <a:rPr sz="1800" b="1" i="0">
+                <a:solidFill>
+                  <a:srgbClr val="8A8577"/>
+                </a:solidFill>
+                <a:latin typeface="Montserrat"/>
+              </a:rPr>
+              <a:t>Isadora Schmidt</a:t>
+            </a:r>
+          </a:p>
+        </p:txBody>
+      </p:sp>
+      <p:sp>
+        <p:nvSpPr>
+          <p:cNvPr id="5" name="TextBox 4"/>
+          <p:cNvSpPr txBox="1"/>
+          <p:nvPr/>
+        </p:nvSpPr>
+        <p:spPr>
+          <a:xfrm>
+            <a:off x="4953000" y="857250"/>
+            <a:ext cx="4572000" cy="630160"/>
+          </a:xfrm>
+          <a:prstGeom prst="rect">
+            <a:avLst/>
+          </a:prstGeom>
+          <a:noFill/>
+        </p:spPr>
+        <p:txBody>
+          <a:bodyPr wrap="square" lIns="0" rIns="0" tIns="0" bIns="0" anchor="t">
+            <a:spAutoFit/>
+          </a:bodyPr>
+          <a:lstStyle/>
+          <a:p>
+            <a:pPr algn="l">
+              <a:lnSpc>
+                <a:spcPct val="100000"/>
+              </a:lnSpc>
+            </a:pPr>
+            <a:r>
+              <a:rPr sz="3600" b="1" i="0">
+                <a:solidFill>
+                  <a:srgbClr val="31662F"/>
+                </a:solidFill>
+                <a:latin typeface="Montserrat"/>
+              </a:rPr>
+              <a:t>Isadora Schmidt</a:t>
+            </a:r>
+          </a:p>
+        </p:txBody>
+      </p:sp>
+      <p:sp>
+        <p:nvSpPr>
+          <p:cNvPr id="6" name="TextBox 5"/>
+          <p:cNvSpPr txBox="1"/>
+          <p:nvPr/>
+        </p:nvSpPr>
+        <p:spPr>
+          <a:xfrm>
+            <a:off x="4953000" y="1449310"/>
+            <a:ext cx="4572000" cy="402823"/>
+          </a:xfrm>
+          <a:prstGeom prst="rect">
+            <a:avLst/>
+          </a:prstGeom>
+          <a:noFill/>
+        </p:spPr>
+        <p:txBody>
+          <a:bodyPr wrap="square" lIns="0" rIns="0" tIns="0" bIns="0" anchor="t">
+            <a:spAutoFit/>
+          </a:bodyPr>
+          <a:lstStyle/>
+          <a:p>
+            <a:pPr algn="l">
+              <a:lnSpc>
+                <a:spcPct val="115000"/>
+              </a:lnSpc>
+            </a:pPr>
+            <a:r>
+              <a:rPr sz="1800" b="0" i="0">
+                <a:solidFill>
+                  <a:srgbClr val="1A1A1A"/>
+                </a:solidFill>
+                <a:latin typeface="Source Sans 3"/>
+              </a:rPr>
+              <a:t>Advanced Programs Mentor</a:t>
+            </a:r>
+          </a:p>
+        </p:txBody>
+      </p:sp>
+      <p:sp>
+        <p:nvSpPr>
+          <p:cNvPr id="7" name="TextBox 6"/>
+          <p:cNvSpPr txBox="1"/>
+          <p:nvPr/>
+        </p:nvSpPr>
+        <p:spPr>
+          <a:xfrm>
+            <a:off x="4953000" y="1928334"/>
+            <a:ext cx="4572000" cy="1069233"/>
+          </a:xfrm>
+          <a:prstGeom prst="rect">
+            <a:avLst/>
+          </a:prstGeom>
+          <a:noFill/>
+        </p:spPr>
+        <p:txBody>
+          <a:bodyPr wrap="square" lIns="0" rIns="0" tIns="0" bIns="0" anchor="t">
+            <a:spAutoFit/>
+          </a:bodyPr>
+          <a:lstStyle/>
+          <a:p>
+            <a:pPr algn="l">
+              <a:lnSpc>
+                <a:spcPct val="115000"/>
+              </a:lnSpc>
+            </a:pPr>
+            <a:r>
+              <a:rPr sz="1900" b="0" i="0">
+                <a:solidFill>
+                  <a:srgbClr val="1A1A1A"/>
+                </a:solidFill>
+                <a:latin typeface="Source Sans 3"/>
+              </a:rPr>
+              <a:t>From Florianópolis, Brazil, now living in Spain. Favourite: lichens, though she loves all her microbes equally.</a:t>
+            </a:r>
+          </a:p>
+        </p:txBody>
+      </p:sp>
+      <p:sp>
+        <p:nvSpPr>
+          <p:cNvPr id="8" name="Rectangle 7"/>
+          <p:cNvSpPr/>
+          <p:nvPr/>
+        </p:nvSpPr>
+        <p:spPr>
+          <a:xfrm>
+            <a:off x="762000" y="6477000"/>
+            <a:ext cx="3810000" cy="4953000"/>
+          </a:xfrm>
+          <a:prstGeom prst="rect">
+            <a:avLst/>
+          </a:prstGeom>
+          <a:solidFill>
+            <a:srgbClr val="E4E6DC"/>
+          </a:solidFill>
+          <a:ln>
+            <a:noFill/>
+          </a:ln>
+          <a:effectLst/>
+        </p:spPr>
+        <p:style>
+          <a:lnRef idx="1">
+            <a:schemeClr val="accent1"/>
+          </a:lnRef>
+          <a:fillRef idx="3">
+            <a:schemeClr val="accent1"/>
+          </a:fillRef>
+          <a:effectRef idx="2">
+            <a:schemeClr val="accent1"/>
+          </a:effectRef>
+          <a:fontRef idx="minor">
+            <a:schemeClr val="lt1"/>
+          </a:fontRef>
+        </p:style>
+        <p:txBody>
+          <a:bodyPr rtlCol="0" anchor="ctr"/>
+          <a:lstStyle/>
+          <a:p>
+            <a:pPr algn="ctr"/>
+          </a:p>
+        </p:txBody>
+      </p:sp>
       <p:pic>
         <p:nvPicPr>
-          <p:cNvPr id="3" name="Picture 2" descr="td-leaf-sprig-paper-1.png"/>
+          <p:cNvPr id="9" name="Picture 8" descr="td-dandelion-short-root-1.png"/>
           <p:cNvPicPr>
             <a:picLocks noChangeAspect="1"/>
           </p:cNvPicPr>
@@ -7329,8 +6141,8 @@
         </p:blipFill>
         <p:spPr>
           <a:xfrm>
-            <a:off x="8221265" y="4953000"/>
-            <a:ext cx="1369218" cy="2190749"/>
+            <a:off x="1804034" y="7048500"/>
+            <a:ext cx="1725930" cy="3048000"/>
           </a:xfrm>
           <a:prstGeom prst="rect">
             <a:avLst/>
@@ -7339,14 +6151,69 @@
       </p:pic>
       <p:sp>
         <p:nvSpPr>
-          <p:cNvPr id="4" name="TextBox 3"/>
+          <p:cNvPr id="10" name="TextBox 9"/>
           <p:cNvSpPr txBox="1"/>
           <p:nvPr/>
         </p:nvSpPr>
         <p:spPr>
           <a:xfrm>
-            <a:off x="762000" y="6419850"/>
-            <a:ext cx="8763000" cy="838181"/>
+            <a:off x="762000" y="10382250"/>
+            <a:ext cx="3810000" cy="762000"/>
+          </a:xfrm>
+          <a:prstGeom prst="rect">
+            <a:avLst/>
+          </a:prstGeom>
+          <a:noFill/>
+        </p:spPr>
+        <p:txBody>
+          <a:bodyPr wrap="square" lIns="0" rIns="0" tIns="0" bIns="0" anchor="t">
+            <a:spAutoFit/>
+          </a:bodyPr>
+          <a:lstStyle/>
+          <a:p>
+            <a:pPr algn="ctr">
+              <a:lnSpc>
+                <a:spcPct val="120000"/>
+              </a:lnSpc>
+            </a:pPr>
+            <a:r>
+              <a:rPr sz="1800" b="1" i="0">
+                <a:solidFill>
+                  <a:srgbClr val="8A8577"/>
+                </a:solidFill>
+                <a:latin typeface="Montserrat"/>
+              </a:rPr>
+              <a:t>PHOTO NEEDED</a:t>
+            </a:r>
+          </a:p>
+          <a:p>
+            <a:pPr algn="ctr">
+              <a:lnSpc>
+                <a:spcPct val="120000"/>
+              </a:lnSpc>
+            </a:pPr>
+            <a:r>
+              <a:rPr sz="1800" b="1" i="0">
+                <a:solidFill>
+                  <a:srgbClr val="8A8577"/>
+                </a:solidFill>
+                <a:latin typeface="Montserrat"/>
+              </a:rPr>
+              <a:t>Aysen Ustunay</a:t>
+            </a:r>
+          </a:p>
+        </p:txBody>
+      </p:sp>
+      <p:sp>
+        <p:nvSpPr>
+          <p:cNvPr id="11" name="TextBox 10"/>
+          <p:cNvSpPr txBox="1"/>
+          <p:nvPr/>
+        </p:nvSpPr>
+        <p:spPr>
+          <a:xfrm>
+            <a:off x="4953000" y="6572250"/>
+            <a:ext cx="4572000" cy="630160"/>
           </a:xfrm>
           <a:prstGeom prst="rect">
             <a:avLst/>
@@ -7365,27 +6232,27 @@
               </a:lnSpc>
             </a:pPr>
             <a:r>
-              <a:rPr sz="5000" b="1" i="0">
+              <a:rPr sz="3600" b="1" i="0">
                 <a:solidFill>
                   <a:srgbClr val="31662F"/>
                 </a:solidFill>
                 <a:latin typeface="Montserrat"/>
               </a:rPr>
-              <a:t>Wesley Sanders</a:t>
-            </a:r>
-          </a:p>
-        </p:txBody>
-      </p:sp>
-      <p:sp>
-        <p:nvSpPr>
-          <p:cNvPr id="5" name="TextBox 4"/>
+              <a:t>Aysen Ustunay</a:t>
+            </a:r>
+          </a:p>
+        </p:txBody>
+      </p:sp>
+      <p:sp>
+        <p:nvSpPr>
+          <p:cNvPr id="12" name="TextBox 11"/>
           <p:cNvSpPr txBox="1"/>
           <p:nvPr/>
         </p:nvSpPr>
         <p:spPr>
           <a:xfrm>
-            <a:off x="762000" y="7219931"/>
-            <a:ext cx="8763000" cy="471173"/>
+            <a:off x="4953000" y="7164310"/>
+            <a:ext cx="4572000" cy="402823"/>
           </a:xfrm>
           <a:prstGeom prst="rect">
             <a:avLst/>
@@ -7404,7 +6271,7 @@
               </a:lnSpc>
             </a:pPr>
             <a:r>
-              <a:rPr sz="2200" b="0" i="0">
+              <a:rPr sz="1800" b="0" i="0">
                 <a:solidFill>
                   <a:srgbClr val="1A1A1A"/>
                 </a:solidFill>
@@ -7417,14 +6284,14 @@
       </p:sp>
       <p:sp>
         <p:nvSpPr>
-          <p:cNvPr id="6" name="TextBox 5"/>
+          <p:cNvPr id="13" name="TextBox 12"/>
           <p:cNvSpPr txBox="1"/>
           <p:nvPr/>
         </p:nvSpPr>
         <p:spPr>
           <a:xfrm>
-            <a:off x="762000" y="7843504"/>
-            <a:ext cx="8763000" cy="2043216"/>
+            <a:off x="4953000" y="7643334"/>
+            <a:ext cx="4572000" cy="744572"/>
           </a:xfrm>
           <a:prstGeom prst="rect">
             <a:avLst/>
@@ -7443,65 +6310,70 @@
               </a:lnSpc>
             </a:pPr>
             <a:r>
-              <a:rPr sz="3800" b="0" i="1">
+              <a:rPr sz="1900" b="0" i="0">
                 <a:solidFill>
                   <a:srgbClr val="1A1A1A"/>
-                </a:solidFill>
-                <a:latin typeface="EB Garamond"/>
-              </a:rPr>
-              <a:t>“Compost can look finished and still lack the biology you need. Check it under the microscope before you apply it.”</a:t>
-            </a:r>
-          </a:p>
-        </p:txBody>
-      </p:sp>
-      <p:sp>
-        <p:nvSpPr>
-          <p:cNvPr id="7" name="TextBox 6"/>
-          <p:cNvSpPr txBox="1"/>
-          <p:nvPr/>
-        </p:nvSpPr>
-        <p:spPr>
-          <a:xfrm>
-            <a:off x="762000" y="9981970"/>
-            <a:ext cx="8763000" cy="1428068"/>
-          </a:xfrm>
-          <a:prstGeom prst="rect">
-            <a:avLst/>
-          </a:prstGeom>
-          <a:noFill/>
-        </p:spPr>
-        <p:txBody>
-          <a:bodyPr wrap="square" lIns="0" rIns="0" tIns="0" bIns="0" anchor="t">
-            <a:spAutoFit/>
-          </a:bodyPr>
-          <a:lstStyle/>
-          <a:p>
-            <a:pPr algn="l">
-              <a:lnSpc>
-                <a:spcPct val="115000"/>
-              </a:lnSpc>
-            </a:pPr>
-            <a:r>
-              <a:rPr sz="2600" b="0" i="0">
-                <a:solidFill>
-                  <a:srgbClr val="31662F"/>
                 </a:solidFill>
                 <a:latin typeface="Source Sans 3"/>
               </a:rPr>
-              <a:t>A farmer and agricultural journalist, then our first lab tech. Runs Foothill Biological Soil Health Services in California's Sierra Nevada foothills.</a:t>
-            </a:r>
-          </a:p>
-        </p:txBody>
-      </p:sp>
-      <p:sp>
-        <p:nvSpPr>
-          <p:cNvPr id="8" name="TextBox 7"/>
+              <a:t>Favourite microbe: flagellates. She loves watching them as babies, running around.</a:t>
+            </a:r>
+          </a:p>
+        </p:txBody>
+      </p:sp>
+      <p:sp>
+        <p:nvSpPr>
+          <p:cNvPr id="14" name="Rectangle 13"/>
+          <p:cNvSpPr/>
+          <p:nvPr/>
+        </p:nvSpPr>
+        <p:spPr>
+          <a:xfrm>
+            <a:off x="762000" y="6096000"/>
+            <a:ext cx="8763000" cy="19050"/>
+          </a:xfrm>
+          <a:prstGeom prst="rect">
+            <a:avLst/>
+          </a:prstGeom>
+          <a:solidFill>
+            <a:srgbClr val="B1BCB1"/>
+          </a:solidFill>
+          <a:ln>
+            <a:noFill/>
+          </a:ln>
+          <a:effectLst/>
+        </p:spPr>
+        <p:style>
+          <a:lnRef idx="1">
+            <a:schemeClr val="accent1"/>
+          </a:lnRef>
+          <a:fillRef idx="3">
+            <a:schemeClr val="accent1"/>
+          </a:fillRef>
+          <a:effectRef idx="2">
+            <a:schemeClr val="accent1"/>
+          </a:effectRef>
+          <a:fontRef idx="minor">
+            <a:schemeClr val="lt1"/>
+          </a:fontRef>
+        </p:style>
+        <p:txBody>
+          <a:bodyPr rtlCol="0" anchor="ctr"/>
+          <a:lstStyle/>
+          <a:p>
+            <a:pPr algn="ctr"/>
+          </a:p>
+        </p:txBody>
+      </p:sp>
+      <p:sp>
+        <p:nvSpPr>
+          <p:cNvPr id="15" name="TextBox 14"/>
           <p:cNvSpPr txBox="1"/>
           <p:nvPr/>
         </p:nvSpPr>
         <p:spPr>
           <a:xfrm>
-            <a:off x="6667500" y="12192000"/>
+            <a:off x="6667500" y="12287250"/>
             <a:ext cx="2857500" cy="285750"/>
           </a:xfrm>
           <a:prstGeom prst="rect">
@@ -7567,7 +6439,7 @@
         <p:spPr>
           <a:xfrm>
             <a:off x="762000" y="762000"/>
-            <a:ext cx="8763000" cy="5334000"/>
+            <a:ext cx="3810000" cy="4953000"/>
           </a:xfrm>
           <a:prstGeom prst="rect">
             <a:avLst/>
@@ -7604,7 +6476,7 @@
       </p:sp>
       <p:pic>
         <p:nvPicPr>
-          <p:cNvPr id="3" name="Picture 2" descr="td-happy-seedling-1.png"/>
+          <p:cNvPr id="3" name="Picture 2" descr="td-tithonia-flower-1.png"/>
           <p:cNvPicPr>
             <a:picLocks noChangeAspect="1"/>
           </p:cNvPicPr>
@@ -7618,17 +6490,150 @@
         </p:blipFill>
         <p:spPr>
           <a:xfrm>
-            <a:off x="952500" y="1178367"/>
-            <a:ext cx="4000500" cy="4501265"/>
+            <a:off x="1870709" y="1333500"/>
+            <a:ext cx="1592580" cy="3048000"/>
           </a:xfrm>
           <a:prstGeom prst="rect">
             <a:avLst/>
           </a:prstGeom>
         </p:spPr>
       </p:pic>
+      <p:sp>
+        <p:nvSpPr>
+          <p:cNvPr id="4" name="TextBox 3"/>
+          <p:cNvSpPr txBox="1"/>
+          <p:nvPr/>
+        </p:nvSpPr>
+        <p:spPr>
+          <a:xfrm>
+            <a:off x="762000" y="4667250"/>
+            <a:ext cx="3810000" cy="762000"/>
+          </a:xfrm>
+          <a:prstGeom prst="rect">
+            <a:avLst/>
+          </a:prstGeom>
+          <a:noFill/>
+        </p:spPr>
+        <p:txBody>
+          <a:bodyPr wrap="square" lIns="0" rIns="0" tIns="0" bIns="0" anchor="t">
+            <a:spAutoFit/>
+          </a:bodyPr>
+          <a:lstStyle/>
+          <a:p>
+            <a:pPr algn="ctr">
+              <a:lnSpc>
+                <a:spcPct val="120000"/>
+              </a:lnSpc>
+            </a:pPr>
+            <a:r>
+              <a:rPr sz="1800" b="1" i="0">
+                <a:solidFill>
+                  <a:srgbClr val="8A8577"/>
+                </a:solidFill>
+                <a:latin typeface="Montserrat"/>
+              </a:rPr>
+              <a:t>PHOTO NEEDED</a:t>
+            </a:r>
+          </a:p>
+          <a:p>
+            <a:pPr algn="ctr">
+              <a:lnSpc>
+                <a:spcPct val="120000"/>
+              </a:lnSpc>
+            </a:pPr>
+            <a:r>
+              <a:rPr sz="1800" b="1" i="0">
+                <a:solidFill>
+                  <a:srgbClr val="8A8577"/>
+                </a:solidFill>
+                <a:latin typeface="Montserrat"/>
+              </a:rPr>
+              <a:t>Dora Tkalec</a:t>
+            </a:r>
+          </a:p>
+        </p:txBody>
+      </p:sp>
+      <p:sp>
+        <p:nvSpPr>
+          <p:cNvPr id="5" name="TextBox 4"/>
+          <p:cNvSpPr txBox="1"/>
+          <p:nvPr/>
+        </p:nvSpPr>
+        <p:spPr>
+          <a:xfrm>
+            <a:off x="4953000" y="857250"/>
+            <a:ext cx="4572000" cy="630160"/>
+          </a:xfrm>
+          <a:prstGeom prst="rect">
+            <a:avLst/>
+          </a:prstGeom>
+          <a:noFill/>
+        </p:spPr>
+        <p:txBody>
+          <a:bodyPr wrap="square" lIns="0" rIns="0" tIns="0" bIns="0" anchor="t">
+            <a:spAutoFit/>
+          </a:bodyPr>
+          <a:lstStyle/>
+          <a:p>
+            <a:pPr algn="l">
+              <a:lnSpc>
+                <a:spcPct val="100000"/>
+              </a:lnSpc>
+            </a:pPr>
+            <a:r>
+              <a:rPr sz="3600" b="1" i="0">
+                <a:solidFill>
+                  <a:srgbClr val="31662F"/>
+                </a:solidFill>
+                <a:latin typeface="Montserrat"/>
+              </a:rPr>
+              <a:t>Dora Tkalec</a:t>
+            </a:r>
+          </a:p>
+        </p:txBody>
+      </p:sp>
+      <p:sp>
+        <p:nvSpPr>
+          <p:cNvPr id="6" name="TextBox 5"/>
+          <p:cNvSpPr txBox="1"/>
+          <p:nvPr/>
+        </p:nvSpPr>
+        <p:spPr>
+          <a:xfrm>
+            <a:off x="4953000" y="1449310"/>
+            <a:ext cx="4572000" cy="402823"/>
+          </a:xfrm>
+          <a:prstGeom prst="rect">
+            <a:avLst/>
+          </a:prstGeom>
+          <a:noFill/>
+        </p:spPr>
+        <p:txBody>
+          <a:bodyPr wrap="square" lIns="0" rIns="0" tIns="0" bIns="0" anchor="t">
+            <a:spAutoFit/>
+          </a:bodyPr>
+          <a:lstStyle/>
+          <a:p>
+            <a:pPr algn="l">
+              <a:lnSpc>
+                <a:spcPct val="115000"/>
+              </a:lnSpc>
+            </a:pPr>
+            <a:r>
+              <a:rPr sz="1800" b="0" i="0">
+                <a:solidFill>
+                  <a:srgbClr val="1A1A1A"/>
+                </a:solidFill>
+                <a:latin typeface="Source Sans 3"/>
+              </a:rPr>
+              <a:t>Advanced Programs Mentor</a:t>
+            </a:r>
+          </a:p>
+        </p:txBody>
+      </p:sp>
       <p:pic>
         <p:nvPicPr>
-          <p:cNvPr id="4" name="Picture 3" descr="td-leaf-sprig-paper-1.png"/>
+          <p:cNvPr id="7" name="Picture 6" descr="8435781680001932561.jpg"/>
           <p:cNvPicPr>
             <a:picLocks noChangeAspect="1"/>
           </p:cNvPicPr>
@@ -7642,8 +6647,8 @@
         </p:blipFill>
         <p:spPr>
           <a:xfrm>
-            <a:off x="5905500" y="1143000"/>
-            <a:ext cx="2857500" cy="4572000"/>
+            <a:off x="762000" y="6477000"/>
+            <a:ext cx="3810000" cy="4953000"/>
           </a:xfrm>
           <a:prstGeom prst="rect">
             <a:avLst/>
@@ -7652,14 +6657,14 @@
       </p:pic>
       <p:sp>
         <p:nvSpPr>
-          <p:cNvPr id="5" name="TextBox 4"/>
+          <p:cNvPr id="8" name="TextBox 7"/>
           <p:cNvSpPr txBox="1"/>
           <p:nvPr/>
         </p:nvSpPr>
         <p:spPr>
           <a:xfrm>
-            <a:off x="762000" y="6419850"/>
-            <a:ext cx="8763000" cy="838181"/>
+            <a:off x="4953000" y="6572250"/>
+            <a:ext cx="4572000" cy="630160"/>
           </a:xfrm>
           <a:prstGeom prst="rect">
             <a:avLst/>
@@ -7678,27 +6683,27 @@
               </a:lnSpc>
             </a:pPr>
             <a:r>
-              <a:rPr sz="5000" b="1" i="0">
+              <a:rPr sz="3600" b="1" i="0">
                 <a:solidFill>
                   <a:srgbClr val="31662F"/>
                 </a:solidFill>
                 <a:latin typeface="Montserrat"/>
               </a:rPr>
-              <a:t>Casey Williams</a:t>
-            </a:r>
-          </a:p>
-        </p:txBody>
-      </p:sp>
-      <p:sp>
-        <p:nvSpPr>
-          <p:cNvPr id="6" name="TextBox 5"/>
+              <a:t>Gerald Ramirez</a:t>
+            </a:r>
+          </a:p>
+        </p:txBody>
+      </p:sp>
+      <p:sp>
+        <p:nvSpPr>
+          <p:cNvPr id="9" name="TextBox 8"/>
           <p:cNvSpPr txBox="1"/>
           <p:nvPr/>
         </p:nvSpPr>
         <p:spPr>
           <a:xfrm>
-            <a:off x="762000" y="7219931"/>
-            <a:ext cx="8763000" cy="471173"/>
+            <a:off x="4953000" y="7164310"/>
+            <a:ext cx="4572000" cy="402823"/>
           </a:xfrm>
           <a:prstGeom prst="rect">
             <a:avLst/>
@@ -7717,7 +6722,7 @@
               </a:lnSpc>
             </a:pPr>
             <a:r>
-              <a:rPr sz="2200" b="0" i="0">
+              <a:rPr sz="1800" b="0" i="0">
                 <a:solidFill>
                   <a:srgbClr val="1A1A1A"/>
                 </a:solidFill>
@@ -7730,14 +6735,14 @@
       </p:sp>
       <p:sp>
         <p:nvSpPr>
-          <p:cNvPr id="7" name="TextBox 6"/>
+          <p:cNvPr id="10" name="TextBox 9"/>
           <p:cNvSpPr txBox="1"/>
           <p:nvPr/>
         </p:nvSpPr>
         <p:spPr>
           <a:xfrm>
-            <a:off x="762000" y="7843504"/>
-            <a:ext cx="8763000" cy="983795"/>
+            <a:off x="4953000" y="7643334"/>
+            <a:ext cx="4572000" cy="1325544"/>
           </a:xfrm>
           <a:prstGeom prst="rect">
             <a:avLst/>
@@ -7756,26 +6761,109 @@
               </a:lnSpc>
             </a:pPr>
             <a:r>
-              <a:rPr sz="2600" b="0" i="0">
+              <a:rPr sz="2400" b="0" i="1">
                 <a:solidFill>
                   <a:srgbClr val="1A1A1A"/>
+                </a:solidFill>
+                <a:latin typeface="EB Garamond"/>
+              </a:rPr>
+              <a:t>“Extracts pull organisms off the compost into solution, so you can apply biology across a whole field.”</a:t>
+            </a:r>
+          </a:p>
+        </p:txBody>
+      </p:sp>
+      <p:sp>
+        <p:nvSpPr>
+          <p:cNvPr id="11" name="TextBox 10"/>
+          <p:cNvSpPr txBox="1"/>
+          <p:nvPr/>
+        </p:nvSpPr>
+        <p:spPr>
+          <a:xfrm>
+            <a:off x="4953000" y="8987928"/>
+            <a:ext cx="4572000" cy="1393894"/>
+          </a:xfrm>
+          <a:prstGeom prst="rect">
+            <a:avLst/>
+          </a:prstGeom>
+          <a:noFill/>
+        </p:spPr>
+        <p:txBody>
+          <a:bodyPr wrap="square" lIns="0" rIns="0" tIns="0" bIns="0" anchor="t">
+            <a:spAutoFit/>
+          </a:bodyPr>
+          <a:lstStyle/>
+          <a:p>
+            <a:pPr algn="l">
+              <a:lnSpc>
+                <a:spcPct val="115000"/>
+              </a:lnSpc>
+            </a:pPr>
+            <a:r>
+              <a:rPr sz="1900" b="0" i="0">
+                <a:solidFill>
+                  <a:srgbClr val="31662F"/>
                 </a:solidFill>
                 <a:latin typeface="Source Sans 3"/>
               </a:rPr>
-              <a:t>Around ten years of farming and gardening. A long-time student, now teaching. Favourite microbe: rotifers.</a:t>
-            </a:r>
-          </a:p>
-        </p:txBody>
-      </p:sp>
-      <p:sp>
-        <p:nvSpPr>
-          <p:cNvPr id="8" name="TextBox 7"/>
+              <a:t>An agronomist from the University of Costa Rica, who went looking for Dr. Elaine's teaching. Now he teaches it, from compost extracts to teas.</a:t>
+            </a:r>
+          </a:p>
+        </p:txBody>
+      </p:sp>
+      <p:sp>
+        <p:nvSpPr>
+          <p:cNvPr id="12" name="Rectangle 11"/>
+          <p:cNvSpPr/>
+          <p:nvPr/>
+        </p:nvSpPr>
+        <p:spPr>
+          <a:xfrm>
+            <a:off x="762000" y="6096000"/>
+            <a:ext cx="8763000" cy="19050"/>
+          </a:xfrm>
+          <a:prstGeom prst="rect">
+            <a:avLst/>
+          </a:prstGeom>
+          <a:solidFill>
+            <a:srgbClr val="B1BCB1"/>
+          </a:solidFill>
+          <a:ln>
+            <a:noFill/>
+          </a:ln>
+          <a:effectLst/>
+        </p:spPr>
+        <p:style>
+          <a:lnRef idx="1">
+            <a:schemeClr val="accent1"/>
+          </a:lnRef>
+          <a:fillRef idx="3">
+            <a:schemeClr val="accent1"/>
+          </a:fillRef>
+          <a:effectRef idx="2">
+            <a:schemeClr val="accent1"/>
+          </a:effectRef>
+          <a:fontRef idx="minor">
+            <a:schemeClr val="lt1"/>
+          </a:fontRef>
+        </p:style>
+        <p:txBody>
+          <a:bodyPr rtlCol="0" anchor="ctr"/>
+          <a:lstStyle/>
+          <a:p>
+            <a:pPr algn="ctr"/>
+          </a:p>
+        </p:txBody>
+      </p:sp>
+      <p:sp>
+        <p:nvSpPr>
+          <p:cNvPr id="13" name="TextBox 12"/>
           <p:cNvSpPr txBox="1"/>
           <p:nvPr/>
         </p:nvSpPr>
         <p:spPr>
           <a:xfrm>
-            <a:off x="6667500" y="12192000"/>
+            <a:off x="6667500" y="12287250"/>
             <a:ext cx="2857500" cy="285750"/>
           </a:xfrm>
           <a:prstGeom prst="rect">
@@ -7841,7 +6929,7 @@
         <p:spPr>
           <a:xfrm>
             <a:off x="762000" y="762000"/>
-            <a:ext cx="8763000" cy="5334000"/>
+            <a:ext cx="3810000" cy="4953000"/>
           </a:xfrm>
           <a:prstGeom prst="rect">
             <a:avLst/>
@@ -7878,7 +6966,7 @@
       </p:sp>
       <p:pic>
         <p:nvPicPr>
-          <p:cNvPr id="3" name="Picture 2" descr="td-dried-flowers-1-1.png"/>
+          <p:cNvPr id="3" name="Picture 2" descr="td-happy-seedling-1.png"/>
           <p:cNvPicPr>
             <a:picLocks noChangeAspect="1"/>
           </p:cNvPicPr>
@@ -7892,17 +6980,194 @@
         </p:blipFill>
         <p:spPr>
           <a:xfrm>
-            <a:off x="1181100" y="1143000"/>
-            <a:ext cx="3543300" cy="4572000"/>
+            <a:off x="1714500" y="1785770"/>
+            <a:ext cx="1905000" cy="2143459"/>
           </a:xfrm>
           <a:prstGeom prst="rect">
             <a:avLst/>
           </a:prstGeom>
         </p:spPr>
       </p:pic>
+      <p:sp>
+        <p:nvSpPr>
+          <p:cNvPr id="4" name="TextBox 3"/>
+          <p:cNvSpPr txBox="1"/>
+          <p:nvPr/>
+        </p:nvSpPr>
+        <p:spPr>
+          <a:xfrm>
+            <a:off x="762000" y="4667250"/>
+            <a:ext cx="3810000" cy="762000"/>
+          </a:xfrm>
+          <a:prstGeom prst="rect">
+            <a:avLst/>
+          </a:prstGeom>
+          <a:noFill/>
+        </p:spPr>
+        <p:txBody>
+          <a:bodyPr wrap="square" lIns="0" rIns="0" tIns="0" bIns="0" anchor="t">
+            <a:spAutoFit/>
+          </a:bodyPr>
+          <a:lstStyle/>
+          <a:p>
+            <a:pPr algn="ctr">
+              <a:lnSpc>
+                <a:spcPct val="120000"/>
+              </a:lnSpc>
+            </a:pPr>
+            <a:r>
+              <a:rPr sz="1800" b="1" i="0">
+                <a:solidFill>
+                  <a:srgbClr val="8A8577"/>
+                </a:solidFill>
+                <a:latin typeface="Montserrat"/>
+              </a:rPr>
+              <a:t>PHOTO NEEDED</a:t>
+            </a:r>
+          </a:p>
+          <a:p>
+            <a:pPr algn="ctr">
+              <a:lnSpc>
+                <a:spcPct val="120000"/>
+              </a:lnSpc>
+            </a:pPr>
+            <a:r>
+              <a:rPr sz="1800" b="1" i="0">
+                <a:solidFill>
+                  <a:srgbClr val="8A8577"/>
+                </a:solidFill>
+                <a:latin typeface="Montserrat"/>
+              </a:rPr>
+              <a:t>Elena Kalli</a:t>
+            </a:r>
+          </a:p>
+        </p:txBody>
+      </p:sp>
+      <p:sp>
+        <p:nvSpPr>
+          <p:cNvPr id="5" name="TextBox 4"/>
+          <p:cNvSpPr txBox="1"/>
+          <p:nvPr/>
+        </p:nvSpPr>
+        <p:spPr>
+          <a:xfrm>
+            <a:off x="4953000" y="857250"/>
+            <a:ext cx="4572000" cy="630160"/>
+          </a:xfrm>
+          <a:prstGeom prst="rect">
+            <a:avLst/>
+          </a:prstGeom>
+          <a:noFill/>
+        </p:spPr>
+        <p:txBody>
+          <a:bodyPr wrap="square" lIns="0" rIns="0" tIns="0" bIns="0" anchor="t">
+            <a:spAutoFit/>
+          </a:bodyPr>
+          <a:lstStyle/>
+          <a:p>
+            <a:pPr algn="l">
+              <a:lnSpc>
+                <a:spcPct val="100000"/>
+              </a:lnSpc>
+            </a:pPr>
+            <a:r>
+              <a:rPr sz="3600" b="1" i="0">
+                <a:solidFill>
+                  <a:srgbClr val="31662F"/>
+                </a:solidFill>
+                <a:latin typeface="Montserrat"/>
+              </a:rPr>
+              <a:t>Elena Kalli</a:t>
+            </a:r>
+          </a:p>
+        </p:txBody>
+      </p:sp>
+      <p:sp>
+        <p:nvSpPr>
+          <p:cNvPr id="6" name="TextBox 5"/>
+          <p:cNvSpPr txBox="1"/>
+          <p:nvPr/>
+        </p:nvSpPr>
+        <p:spPr>
+          <a:xfrm>
+            <a:off x="4953000" y="1449310"/>
+            <a:ext cx="4572000" cy="402823"/>
+          </a:xfrm>
+          <a:prstGeom prst="rect">
+            <a:avLst/>
+          </a:prstGeom>
+          <a:noFill/>
+        </p:spPr>
+        <p:txBody>
+          <a:bodyPr wrap="square" lIns="0" rIns="0" tIns="0" bIns="0" anchor="t">
+            <a:spAutoFit/>
+          </a:bodyPr>
+          <a:lstStyle/>
+          <a:p>
+            <a:pPr algn="l">
+              <a:lnSpc>
+                <a:spcPct val="115000"/>
+              </a:lnSpc>
+            </a:pPr>
+            <a:r>
+              <a:rPr sz="1800" b="0" i="0">
+                <a:solidFill>
+                  <a:srgbClr val="1A1A1A"/>
+                </a:solidFill>
+                <a:latin typeface="Source Sans 3"/>
+              </a:rPr>
+              <a:t>Advanced Programs Admin</a:t>
+            </a:r>
+          </a:p>
+        </p:txBody>
+      </p:sp>
+      <p:sp>
+        <p:nvSpPr>
+          <p:cNvPr id="7" name="Rectangle 6"/>
+          <p:cNvSpPr/>
+          <p:nvPr/>
+        </p:nvSpPr>
+        <p:spPr>
+          <a:xfrm>
+            <a:off x="762000" y="6477000"/>
+            <a:ext cx="3810000" cy="4953000"/>
+          </a:xfrm>
+          <a:prstGeom prst="rect">
+            <a:avLst/>
+          </a:prstGeom>
+          <a:solidFill>
+            <a:srgbClr val="E4E6DC"/>
+          </a:solidFill>
+          <a:ln>
+            <a:noFill/>
+          </a:ln>
+          <a:effectLst/>
+        </p:spPr>
+        <p:style>
+          <a:lnRef idx="1">
+            <a:schemeClr val="accent1"/>
+          </a:lnRef>
+          <a:fillRef idx="3">
+            <a:schemeClr val="accent1"/>
+          </a:fillRef>
+          <a:effectRef idx="2">
+            <a:schemeClr val="accent1"/>
+          </a:effectRef>
+          <a:fontRef idx="minor">
+            <a:schemeClr val="lt1"/>
+          </a:fontRef>
+        </p:style>
+        <p:txBody>
+          <a:bodyPr rtlCol="0" anchor="ctr"/>
+          <a:lstStyle/>
+          <a:p>
+            <a:pPr algn="ctr"/>
+          </a:p>
+        </p:txBody>
+      </p:sp>
       <p:pic>
         <p:nvPicPr>
-          <p:cNvPr id="4" name="Picture 3" descr="td-tithonia-flower-1.png"/>
+          <p:cNvPr id="8" name="Picture 7" descr="td-leaf-sprig-paper-1.png"/>
           <p:cNvPicPr>
             <a:picLocks noChangeAspect="1"/>
           </p:cNvPicPr>
@@ -7916,8 +7181,8 @@
         </p:blipFill>
         <p:spPr>
           <a:xfrm>
-            <a:off x="6139815" y="1143000"/>
-            <a:ext cx="2388870" cy="4572000"/>
+            <a:off x="1714500" y="7048500"/>
+            <a:ext cx="1905000" cy="3048000"/>
           </a:xfrm>
           <a:prstGeom prst="rect">
             <a:avLst/>
@@ -7926,14 +7191,69 @@
       </p:pic>
       <p:sp>
         <p:nvSpPr>
-          <p:cNvPr id="5" name="TextBox 4"/>
+          <p:cNvPr id="9" name="TextBox 8"/>
           <p:cNvSpPr txBox="1"/>
           <p:nvPr/>
         </p:nvSpPr>
         <p:spPr>
           <a:xfrm>
-            <a:off x="762000" y="6419850"/>
-            <a:ext cx="8763000" cy="838181"/>
+            <a:off x="762000" y="10382250"/>
+            <a:ext cx="3810000" cy="762000"/>
+          </a:xfrm>
+          <a:prstGeom prst="rect">
+            <a:avLst/>
+          </a:prstGeom>
+          <a:noFill/>
+        </p:spPr>
+        <p:txBody>
+          <a:bodyPr wrap="square" lIns="0" rIns="0" tIns="0" bIns="0" anchor="t">
+            <a:spAutoFit/>
+          </a:bodyPr>
+          <a:lstStyle/>
+          <a:p>
+            <a:pPr algn="ctr">
+              <a:lnSpc>
+                <a:spcPct val="120000"/>
+              </a:lnSpc>
+            </a:pPr>
+            <a:r>
+              <a:rPr sz="1800" b="1" i="0">
+                <a:solidFill>
+                  <a:srgbClr val="8A8577"/>
+                </a:solidFill>
+                <a:latin typeface="Montserrat"/>
+              </a:rPr>
+              <a:t>PHOTO NEEDED</a:t>
+            </a:r>
+          </a:p>
+          <a:p>
+            <a:pPr algn="ctr">
+              <a:lnSpc>
+                <a:spcPct val="120000"/>
+              </a:lnSpc>
+            </a:pPr>
+            <a:r>
+              <a:rPr sz="1800" b="1" i="0">
+                <a:solidFill>
+                  <a:srgbClr val="8A8577"/>
+                </a:solidFill>
+                <a:latin typeface="Montserrat"/>
+              </a:rPr>
+              <a:t>Ib Borup Pederson</a:t>
+            </a:r>
+          </a:p>
+        </p:txBody>
+      </p:sp>
+      <p:sp>
+        <p:nvSpPr>
+          <p:cNvPr id="10" name="TextBox 9"/>
+          <p:cNvSpPr txBox="1"/>
+          <p:nvPr/>
+        </p:nvSpPr>
+        <p:spPr>
+          <a:xfrm>
+            <a:off x="4953000" y="6572250"/>
+            <a:ext cx="4572000" cy="630160"/>
           </a:xfrm>
           <a:prstGeom prst="rect">
             <a:avLst/>
@@ -7952,27 +7272,27 @@
               </a:lnSpc>
             </a:pPr>
             <a:r>
-              <a:rPr sz="5000" b="1" i="0">
+              <a:rPr sz="3600" b="1" i="0">
                 <a:solidFill>
                   <a:srgbClr val="31662F"/>
                 </a:solidFill>
                 <a:latin typeface="Montserrat"/>
               </a:rPr>
-              <a:t>Brian Daubenspeck</a:t>
-            </a:r>
-          </a:p>
-        </p:txBody>
-      </p:sp>
-      <p:sp>
-        <p:nvSpPr>
-          <p:cNvPr id="6" name="TextBox 5"/>
+              <a:t>Ib Borup Pederson</a:t>
+            </a:r>
+          </a:p>
+        </p:txBody>
+      </p:sp>
+      <p:sp>
+        <p:nvSpPr>
+          <p:cNvPr id="11" name="TextBox 10"/>
           <p:cNvSpPr txBox="1"/>
           <p:nvPr/>
         </p:nvSpPr>
         <p:spPr>
           <a:xfrm>
-            <a:off x="762000" y="7219931"/>
-            <a:ext cx="8763000" cy="471173"/>
+            <a:off x="4953000" y="7164310"/>
+            <a:ext cx="4572000" cy="402823"/>
           </a:xfrm>
           <a:prstGeom prst="rect">
             <a:avLst/>
@@ -7991,7 +7311,7 @@
               </a:lnSpc>
             </a:pPr>
             <a:r>
-              <a:rPr sz="2200" b="0" i="0">
+              <a:rPr sz="1800" b="0" i="0">
                 <a:solidFill>
                   <a:srgbClr val="1A1A1A"/>
                 </a:solidFill>
@@ -8004,52 +7324,57 @@
       </p:sp>
       <p:sp>
         <p:nvSpPr>
-          <p:cNvPr id="7" name="TextBox 6"/>
+          <p:cNvPr id="12" name="Rectangle 11"/>
+          <p:cNvSpPr/>
+          <p:nvPr/>
+        </p:nvSpPr>
+        <p:spPr>
+          <a:xfrm>
+            <a:off x="762000" y="6096000"/>
+            <a:ext cx="8763000" cy="19050"/>
+          </a:xfrm>
+          <a:prstGeom prst="rect">
+            <a:avLst/>
+          </a:prstGeom>
+          <a:solidFill>
+            <a:srgbClr val="B1BCB1"/>
+          </a:solidFill>
+          <a:ln>
+            <a:noFill/>
+          </a:ln>
+          <a:effectLst/>
+        </p:spPr>
+        <p:style>
+          <a:lnRef idx="1">
+            <a:schemeClr val="accent1"/>
+          </a:lnRef>
+          <a:fillRef idx="3">
+            <a:schemeClr val="accent1"/>
+          </a:fillRef>
+          <a:effectRef idx="2">
+            <a:schemeClr val="accent1"/>
+          </a:effectRef>
+          <a:fontRef idx="minor">
+            <a:schemeClr val="lt1"/>
+          </a:fontRef>
+        </p:style>
+        <p:txBody>
+          <a:bodyPr rtlCol="0" anchor="ctr"/>
+          <a:lstStyle/>
+          <a:p>
+            <a:pPr algn="ctr"/>
+          </a:p>
+        </p:txBody>
+      </p:sp>
+      <p:sp>
+        <p:nvSpPr>
+          <p:cNvPr id="13" name="TextBox 12"/>
           <p:cNvSpPr txBox="1"/>
           <p:nvPr/>
         </p:nvSpPr>
         <p:spPr>
           <a:xfrm>
-            <a:off x="762000" y="7843504"/>
-            <a:ext cx="8763000" cy="983795"/>
-          </a:xfrm>
-          <a:prstGeom prst="rect">
-            <a:avLst/>
-          </a:prstGeom>
-          <a:noFill/>
-        </p:spPr>
-        <p:txBody>
-          <a:bodyPr wrap="square" lIns="0" rIns="0" tIns="0" bIns="0" anchor="t">
-            <a:spAutoFit/>
-          </a:bodyPr>
-          <a:lstStyle/>
-          <a:p>
-            <a:pPr algn="l">
-              <a:lnSpc>
-                <a:spcPct val="115000"/>
-              </a:lnSpc>
-            </a:pPr>
-            <a:r>
-              <a:rPr sz="2600" b="0" i="0">
-                <a:solidFill>
-                  <a:srgbClr val="1A1A1A"/>
-                </a:solidFill>
-                <a:latin typeface="Source Sans 3"/>
-              </a:rPr>
-              <a:t>Manages orchards in California, after years in New Mexico. Favourite microbes: the small underdogs.</a:t>
-            </a:r>
-          </a:p>
-        </p:txBody>
-      </p:sp>
-      <p:sp>
-        <p:nvSpPr>
-          <p:cNvPr id="8" name="TextBox 7"/>
-          <p:cNvSpPr txBox="1"/>
-          <p:nvPr/>
-        </p:nvSpPr>
-        <p:spPr>
-          <a:xfrm>
-            <a:off x="6667500" y="12192000"/>
+            <a:off x="6667500" y="12287250"/>
             <a:ext cx="2857500" cy="285750"/>
           </a:xfrm>
           <a:prstGeom prst="rect">
@@ -8106,16 +7431,196 @@
         <p:nvPr/>
       </p:nvGrpSpPr>
       <p:grpSpPr/>
-      <p:sp>
-        <p:nvSpPr>
-          <p:cNvPr id="2" name="Rectangle 1"/>
+      <p:pic>
+        <p:nvPicPr>
+          <p:cNvPr id="2" name="Picture 1" descr="739824118248019756.jpg"/>
+          <p:cNvPicPr>
+            <a:picLocks noChangeAspect="1"/>
+          </p:cNvPicPr>
+          <p:nvPr/>
+        </p:nvPicPr>
+        <p:blipFill>
+          <a:blip r:embed="rId3"/>
+          <a:stretch>
+            <a:fillRect/>
+          </a:stretch>
+        </p:blipFill>
+        <p:spPr>
+          <a:xfrm>
+            <a:off x="762000" y="762000"/>
+            <a:ext cx="3810000" cy="4953000"/>
+          </a:xfrm>
+          <a:prstGeom prst="rect">
+            <a:avLst/>
+          </a:prstGeom>
+        </p:spPr>
+      </p:pic>
+      <p:sp>
+        <p:nvSpPr>
+          <p:cNvPr id="3" name="TextBox 2"/>
+          <p:cNvSpPr txBox="1"/>
+          <p:nvPr/>
+        </p:nvSpPr>
+        <p:spPr>
+          <a:xfrm>
+            <a:off x="4953000" y="857250"/>
+            <a:ext cx="4572000" cy="630160"/>
+          </a:xfrm>
+          <a:prstGeom prst="rect">
+            <a:avLst/>
+          </a:prstGeom>
+          <a:noFill/>
+        </p:spPr>
+        <p:txBody>
+          <a:bodyPr wrap="square" lIns="0" rIns="0" tIns="0" bIns="0" anchor="t">
+            <a:spAutoFit/>
+          </a:bodyPr>
+          <a:lstStyle/>
+          <a:p>
+            <a:pPr algn="l">
+              <a:lnSpc>
+                <a:spcPct val="100000"/>
+              </a:lnSpc>
+            </a:pPr>
+            <a:r>
+              <a:rPr sz="3600" b="1" i="0">
+                <a:solidFill>
+                  <a:srgbClr val="31662F"/>
+                </a:solidFill>
+                <a:latin typeface="Montserrat"/>
+              </a:rPr>
+              <a:t>Nick Padwick</a:t>
+            </a:r>
+          </a:p>
+        </p:txBody>
+      </p:sp>
+      <p:sp>
+        <p:nvSpPr>
+          <p:cNvPr id="4" name="TextBox 3"/>
+          <p:cNvSpPr txBox="1"/>
+          <p:nvPr/>
+        </p:nvSpPr>
+        <p:spPr>
+          <a:xfrm>
+            <a:off x="4953000" y="1449310"/>
+            <a:ext cx="4572000" cy="402823"/>
+          </a:xfrm>
+          <a:prstGeom prst="rect">
+            <a:avLst/>
+          </a:prstGeom>
+          <a:noFill/>
+        </p:spPr>
+        <p:txBody>
+          <a:bodyPr wrap="square" lIns="0" rIns="0" tIns="0" bIns="0" anchor="t">
+            <a:spAutoFit/>
+          </a:bodyPr>
+          <a:lstStyle/>
+          <a:p>
+            <a:pPr algn="l">
+              <a:lnSpc>
+                <a:spcPct val="115000"/>
+              </a:lnSpc>
+            </a:pPr>
+            <a:r>
+              <a:rPr sz="1800" b="0" i="0">
+                <a:solidFill>
+                  <a:srgbClr val="1A1A1A"/>
+                </a:solidFill>
+                <a:latin typeface="Source Sans 3"/>
+              </a:rPr>
+              <a:t>Advanced Programs Mentor</a:t>
+            </a:r>
+          </a:p>
+        </p:txBody>
+      </p:sp>
+      <p:sp>
+        <p:nvSpPr>
+          <p:cNvPr id="5" name="TextBox 4"/>
+          <p:cNvSpPr txBox="1"/>
+          <p:nvPr/>
+        </p:nvSpPr>
+        <p:spPr>
+          <a:xfrm>
+            <a:off x="4953000" y="1928334"/>
+            <a:ext cx="4572000" cy="915446"/>
+          </a:xfrm>
+          <a:prstGeom prst="rect">
+            <a:avLst/>
+          </a:prstGeom>
+          <a:noFill/>
+        </p:spPr>
+        <p:txBody>
+          <a:bodyPr wrap="square" lIns="0" rIns="0" tIns="0" bIns="0" anchor="t">
+            <a:spAutoFit/>
+          </a:bodyPr>
+          <a:lstStyle/>
+          <a:p>
+            <a:pPr algn="l">
+              <a:lnSpc>
+                <a:spcPct val="115000"/>
+              </a:lnSpc>
+            </a:pPr>
+            <a:r>
+              <a:rPr sz="2400" b="0" i="1">
+                <a:solidFill>
+                  <a:srgbClr val="1A1A1A"/>
+                </a:solidFill>
+                <a:latin typeface="EB Garamond"/>
+              </a:rPr>
+              <a:t>“I make 750 tons of compost a year. Biology works at any scale.”</a:t>
+            </a:r>
+          </a:p>
+        </p:txBody>
+      </p:sp>
+      <p:sp>
+        <p:nvSpPr>
+          <p:cNvPr id="6" name="TextBox 5"/>
+          <p:cNvSpPr txBox="1"/>
+          <p:nvPr/>
+        </p:nvSpPr>
+        <p:spPr>
+          <a:xfrm>
+            <a:off x="4953000" y="2862830"/>
+            <a:ext cx="4572000" cy="1069233"/>
+          </a:xfrm>
+          <a:prstGeom prst="rect">
+            <a:avLst/>
+          </a:prstGeom>
+          <a:noFill/>
+        </p:spPr>
+        <p:txBody>
+          <a:bodyPr wrap="square" lIns="0" rIns="0" tIns="0" bIns="0" anchor="t">
+            <a:spAutoFit/>
+          </a:bodyPr>
+          <a:lstStyle/>
+          <a:p>
+            <a:pPr algn="l">
+              <a:lnSpc>
+                <a:spcPct val="115000"/>
+              </a:lnSpc>
+            </a:pPr>
+            <a:r>
+              <a:rPr sz="1900" b="0" i="0">
+                <a:solidFill>
+                  <a:srgbClr val="31662F"/>
+                </a:solidFill>
+                <a:latin typeface="Source Sans 3"/>
+              </a:rPr>
+              <a:t>Manages Ken Hill Estate, home of Wild Ken Hill, in West Norfolk, England. Farmers Weekly Farmer of the Year, 2009.</a:t>
+            </a:r>
+          </a:p>
+        </p:txBody>
+      </p:sp>
+      <p:sp>
+        <p:nvSpPr>
+          <p:cNvPr id="7" name="Rectangle 6"/>
           <p:cNvSpPr/>
           <p:nvPr/>
         </p:nvSpPr>
         <p:spPr>
           <a:xfrm>
-            <a:off x="762000" y="762000"/>
-            <a:ext cx="8763000" cy="5334000"/>
+            <a:off x="762000" y="6477000"/>
+            <a:ext cx="3810000" cy="4953000"/>
           </a:xfrm>
           <a:prstGeom prst="rect">
             <a:avLst/>
@@ -8152,31 +7657,7 @@
       </p:sp>
       <p:pic>
         <p:nvPicPr>
-          <p:cNvPr id="3" name="Picture 2" descr="td-dried-flowers-2-1.png"/>
-          <p:cNvPicPr>
-            <a:picLocks noChangeAspect="1"/>
-          </p:cNvPicPr>
-          <p:nvPr/>
-        </p:nvPicPr>
-        <p:blipFill>
-          <a:blip r:embed="rId3"/>
-          <a:stretch>
-            <a:fillRect/>
-          </a:stretch>
-        </p:blipFill>
-        <p:spPr>
-          <a:xfrm>
-            <a:off x="1435417" y="1143000"/>
-            <a:ext cx="3034664" cy="4572000"/>
-          </a:xfrm>
-          <a:prstGeom prst="rect">
-            <a:avLst/>
-          </a:prstGeom>
-        </p:spPr>
-      </p:pic>
-      <p:pic>
-        <p:nvPicPr>
-          <p:cNvPr id="4" name="Picture 3" descr="td-happy-seedling-1.png"/>
+          <p:cNvPr id="8" name="Picture 7" descr="td-tithonia-flower-1.png"/>
           <p:cNvPicPr>
             <a:picLocks noChangeAspect="1"/>
           </p:cNvPicPr>
@@ -8190,8 +7671,8 @@
         </p:blipFill>
         <p:spPr>
           <a:xfrm>
-            <a:off x="5334000" y="1178367"/>
-            <a:ext cx="4000500" cy="4501265"/>
+            <a:off x="1870709" y="7048500"/>
+            <a:ext cx="1592580" cy="3048000"/>
           </a:xfrm>
           <a:prstGeom prst="rect">
             <a:avLst/>
@@ -8200,14 +7681,69 @@
       </p:pic>
       <p:sp>
         <p:nvSpPr>
-          <p:cNvPr id="5" name="TextBox 4"/>
+          <p:cNvPr id="9" name="TextBox 8"/>
           <p:cNvSpPr txBox="1"/>
           <p:nvPr/>
         </p:nvSpPr>
         <p:spPr>
           <a:xfrm>
-            <a:off x="762000" y="6419850"/>
-            <a:ext cx="8763000" cy="838181"/>
+            <a:off x="762000" y="10382250"/>
+            <a:ext cx="3810000" cy="762000"/>
+          </a:xfrm>
+          <a:prstGeom prst="rect">
+            <a:avLst/>
+          </a:prstGeom>
+          <a:noFill/>
+        </p:spPr>
+        <p:txBody>
+          <a:bodyPr wrap="square" lIns="0" rIns="0" tIns="0" bIns="0" anchor="t">
+            <a:spAutoFit/>
+          </a:bodyPr>
+          <a:lstStyle/>
+          <a:p>
+            <a:pPr algn="ctr">
+              <a:lnSpc>
+                <a:spcPct val="120000"/>
+              </a:lnSpc>
+            </a:pPr>
+            <a:r>
+              <a:rPr sz="1800" b="1" i="0">
+                <a:solidFill>
+                  <a:srgbClr val="8A8577"/>
+                </a:solidFill>
+                <a:latin typeface="Montserrat"/>
+              </a:rPr>
+              <a:t>PHOTO NEEDED</a:t>
+            </a:r>
+          </a:p>
+          <a:p>
+            <a:pPr algn="ctr">
+              <a:lnSpc>
+                <a:spcPct val="120000"/>
+              </a:lnSpc>
+            </a:pPr>
+            <a:r>
+              <a:rPr sz="1800" b="1" i="0">
+                <a:solidFill>
+                  <a:srgbClr val="8A8577"/>
+                </a:solidFill>
+                <a:latin typeface="Montserrat"/>
+              </a:rPr>
+              <a:t>Delvin Solkinson</a:t>
+            </a:r>
+          </a:p>
+        </p:txBody>
+      </p:sp>
+      <p:sp>
+        <p:nvSpPr>
+          <p:cNvPr id="10" name="TextBox 9"/>
+          <p:cNvSpPr txBox="1"/>
+          <p:nvPr/>
+        </p:nvSpPr>
+        <p:spPr>
+          <a:xfrm>
+            <a:off x="4953000" y="6572250"/>
+            <a:ext cx="4572000" cy="630160"/>
           </a:xfrm>
           <a:prstGeom prst="rect">
             <a:avLst/>
@@ -8226,27 +7762,27 @@
               </a:lnSpc>
             </a:pPr>
             <a:r>
-              <a:rPr sz="5000" b="1" i="0">
+              <a:rPr sz="3600" b="1" i="0">
                 <a:solidFill>
                   <a:srgbClr val="31662F"/>
                 </a:solidFill>
                 <a:latin typeface="Montserrat"/>
               </a:rPr>
-              <a:t>Isadora Schmidt</a:t>
-            </a:r>
-          </a:p>
-        </p:txBody>
-      </p:sp>
-      <p:sp>
-        <p:nvSpPr>
-          <p:cNvPr id="6" name="TextBox 5"/>
+              <a:t>Delvin Solkinson</a:t>
+            </a:r>
+          </a:p>
+        </p:txBody>
+      </p:sp>
+      <p:sp>
+        <p:nvSpPr>
+          <p:cNvPr id="11" name="TextBox 10"/>
           <p:cNvSpPr txBox="1"/>
           <p:nvPr/>
         </p:nvSpPr>
         <p:spPr>
           <a:xfrm>
-            <a:off x="762000" y="7219931"/>
-            <a:ext cx="8763000" cy="471173"/>
+            <a:off x="4953000" y="7164310"/>
+            <a:ext cx="4572000" cy="402823"/>
           </a:xfrm>
           <a:prstGeom prst="rect">
             <a:avLst/>
@@ -8265,65 +7801,70 @@
               </a:lnSpc>
             </a:pPr>
             <a:r>
-              <a:rPr sz="2200" b="0" i="0">
+              <a:rPr sz="1800" b="0" i="0">
                 <a:solidFill>
                   <a:srgbClr val="1A1A1A"/>
                 </a:solidFill>
                 <a:latin typeface="Source Sans 3"/>
               </a:rPr>
-              <a:t>Advanced Programs Mentor</a:t>
-            </a:r>
-          </a:p>
-        </p:txBody>
-      </p:sp>
-      <p:sp>
-        <p:nvSpPr>
-          <p:cNvPr id="7" name="TextBox 6"/>
+              <a:t>Permaculture Lead Teacher</a:t>
+            </a:r>
+          </a:p>
+        </p:txBody>
+      </p:sp>
+      <p:sp>
+        <p:nvSpPr>
+          <p:cNvPr id="12" name="Rectangle 11"/>
+          <p:cNvSpPr/>
+          <p:nvPr/>
+        </p:nvSpPr>
+        <p:spPr>
+          <a:xfrm>
+            <a:off x="762000" y="6096000"/>
+            <a:ext cx="8763000" cy="19050"/>
+          </a:xfrm>
+          <a:prstGeom prst="rect">
+            <a:avLst/>
+          </a:prstGeom>
+          <a:solidFill>
+            <a:srgbClr val="B1BCB1"/>
+          </a:solidFill>
+          <a:ln>
+            <a:noFill/>
+          </a:ln>
+          <a:effectLst/>
+        </p:spPr>
+        <p:style>
+          <a:lnRef idx="1">
+            <a:schemeClr val="accent1"/>
+          </a:lnRef>
+          <a:fillRef idx="3">
+            <a:schemeClr val="accent1"/>
+          </a:fillRef>
+          <a:effectRef idx="2">
+            <a:schemeClr val="accent1"/>
+          </a:effectRef>
+          <a:fontRef idx="minor">
+            <a:schemeClr val="lt1"/>
+          </a:fontRef>
+        </p:style>
+        <p:txBody>
+          <a:bodyPr rtlCol="0" anchor="ctr"/>
+          <a:lstStyle/>
+          <a:p>
+            <a:pPr algn="ctr"/>
+          </a:p>
+        </p:txBody>
+      </p:sp>
+      <p:sp>
+        <p:nvSpPr>
+          <p:cNvPr id="13" name="TextBox 12"/>
           <p:cNvSpPr txBox="1"/>
           <p:nvPr/>
         </p:nvSpPr>
         <p:spPr>
           <a:xfrm>
-            <a:off x="762000" y="7843504"/>
-            <a:ext cx="8763000" cy="983795"/>
-          </a:xfrm>
-          <a:prstGeom prst="rect">
-            <a:avLst/>
-          </a:prstGeom>
-          <a:noFill/>
-        </p:spPr>
-        <p:txBody>
-          <a:bodyPr wrap="square" lIns="0" rIns="0" tIns="0" bIns="0" anchor="t">
-            <a:spAutoFit/>
-          </a:bodyPr>
-          <a:lstStyle/>
-          <a:p>
-            <a:pPr algn="l">
-              <a:lnSpc>
-                <a:spcPct val="115000"/>
-              </a:lnSpc>
-            </a:pPr>
-            <a:r>
-              <a:rPr sz="2600" b="0" i="0">
-                <a:solidFill>
-                  <a:srgbClr val="1A1A1A"/>
-                </a:solidFill>
-                <a:latin typeface="Source Sans 3"/>
-              </a:rPr>
-              <a:t>From Florianópolis, Brazil, now living in Spain. Favourite: lichens, though she loves all her microbes equally.</a:t>
-            </a:r>
-          </a:p>
-        </p:txBody>
-      </p:sp>
-      <p:sp>
-        <p:nvSpPr>
-          <p:cNvPr id="8" name="TextBox 7"/>
-          <p:cNvSpPr txBox="1"/>
-          <p:nvPr/>
-        </p:nvSpPr>
-        <p:spPr>
-          <a:xfrm>
-            <a:off x="6667500" y="12192000"/>
+            <a:off x="6667500" y="12287250"/>
             <a:ext cx="2857500" cy="285750"/>
           </a:xfrm>
           <a:prstGeom prst="rect">
@@ -8368,7 +7909,7 @@
     <p:bg>
       <p:bgPr>
         <a:solidFill>
-          <a:srgbClr val="F3F1EA"/>
+          <a:srgbClr val="31662F"/>
         </a:solidFill>
         <a:effectLst/>
       </p:bgPr>
@@ -8382,51 +7923,85 @@
       <p:grpSpPr/>
       <p:sp>
         <p:nvSpPr>
-          <p:cNvPr id="2" name="Rectangle 1"/>
-          <p:cNvSpPr/>
-          <p:nvPr/>
-        </p:nvSpPr>
-        <p:spPr>
-          <a:xfrm>
-            <a:off x="762000" y="762000"/>
-            <a:ext cx="8763000" cy="5334000"/>
-          </a:xfrm>
-          <a:prstGeom prst="rect">
-            <a:avLst/>
-          </a:prstGeom>
-          <a:solidFill>
-            <a:srgbClr val="E4E6DC"/>
-          </a:solidFill>
-          <a:ln>
-            <a:noFill/>
-          </a:ln>
-          <a:effectLst/>
-        </p:spPr>
-        <p:style>
-          <a:lnRef idx="1">
-            <a:schemeClr val="accent1"/>
-          </a:lnRef>
-          <a:fillRef idx="3">
-            <a:schemeClr val="accent1"/>
-          </a:fillRef>
-          <a:effectRef idx="2">
-            <a:schemeClr val="accent1"/>
-          </a:effectRef>
-          <a:fontRef idx="minor">
-            <a:schemeClr val="lt1"/>
-          </a:fontRef>
-        </p:style>
-        <p:txBody>
-          <a:bodyPr rtlCol="0" anchor="ctr"/>
-          <a:lstStyle/>
-          <a:p>
-            <a:pPr algn="ctr"/>
+          <p:cNvPr id="2" name="TextBox 1"/>
+          <p:cNvSpPr txBox="1"/>
+          <p:nvPr/>
+        </p:nvSpPr>
+        <p:spPr>
+          <a:xfrm>
+            <a:off x="762000" y="1333500"/>
+            <a:ext cx="8763000" cy="2476500"/>
+          </a:xfrm>
+          <a:prstGeom prst="rect">
+            <a:avLst/>
+          </a:prstGeom>
+          <a:noFill/>
+        </p:spPr>
+        <p:txBody>
+          <a:bodyPr wrap="square" lIns="0" rIns="0" tIns="0" bIns="0" anchor="t">
+            <a:spAutoFit/>
+          </a:bodyPr>
+          <a:lstStyle/>
+          <a:p>
+            <a:pPr algn="l">
+              <a:lnSpc>
+                <a:spcPct val="108000"/>
+              </a:lnSpc>
+            </a:pPr>
+            <a:r>
+              <a:rPr sz="5200" b="1" i="0">
+                <a:solidFill>
+                  <a:srgbClr val="F3F1EA"/>
+                </a:solidFill>
+                <a:latin typeface="Montserrat"/>
+              </a:rPr>
+              <a:t>Thank you to every mentor who teaches our students to see soil.</a:t>
+            </a:r>
+          </a:p>
+        </p:txBody>
+      </p:sp>
+      <p:sp>
+        <p:nvSpPr>
+          <p:cNvPr id="3" name="TextBox 2"/>
+          <p:cNvSpPr txBox="1"/>
+          <p:nvPr/>
+        </p:nvSpPr>
+        <p:spPr>
+          <a:xfrm>
+            <a:off x="762000" y="4476750"/>
+            <a:ext cx="8763000" cy="3619500"/>
+          </a:xfrm>
+          <a:prstGeom prst="rect">
+            <a:avLst/>
+          </a:prstGeom>
+          <a:noFill/>
+        </p:spPr>
+        <p:txBody>
+          <a:bodyPr wrap="square" lIns="0" rIns="0" tIns="0" bIns="0" anchor="t">
+            <a:spAutoFit/>
+          </a:bodyPr>
+          <a:lstStyle/>
+          <a:p>
+            <a:pPr algn="l">
+              <a:lnSpc>
+                <a:spcPct val="135000"/>
+              </a:lnSpc>
+            </a:pPr>
+            <a:r>
+              <a:rPr sz="3000" b="0" i="1">
+                <a:solidFill>
+                  <a:srgbClr val="F3F1EA"/>
+                </a:solidFill>
+                <a:latin typeface="EB Garamond"/>
+              </a:rPr>
+              <a:t>Tommy Tepper · Loida Vasquez · Carla Portugal · Wesley Sanders · Casey Williams · Brian Daubenspeck · Isadora Schmidt · Aysen Ustunay · Dora Tkalec · Gerald Ramirez · Elena Kalli · Ib Borup Pederson · Nick Padwick · Delvin Solkinson</a:t>
+            </a:r>
           </a:p>
         </p:txBody>
       </p:sp>
       <p:pic>
         <p:nvPicPr>
-          <p:cNvPr id="3" name="Picture 2" descr="td-dandelion-short-root-1.png"/>
+          <p:cNvPr id="4" name="Picture 3" descr="td-leaf-sprig-paper-1.png"/>
           <p:cNvPicPr>
             <a:picLocks noChangeAspect="1"/>
           </p:cNvPicPr>
@@ -8440,8 +8015,8 @@
         </p:blipFill>
         <p:spPr>
           <a:xfrm>
-            <a:off x="1658302" y="1143000"/>
-            <a:ext cx="2588895" cy="4572000"/>
+            <a:off x="762000" y="8991600"/>
+            <a:ext cx="1619250" cy="2590800"/>
           </a:xfrm>
           <a:prstGeom prst="rect">
             <a:avLst/>
@@ -8450,7 +8025,7 @@
       </p:pic>
       <p:pic>
         <p:nvPicPr>
-          <p:cNvPr id="4" name="Picture 3" descr="td-leaf-sprig-paper-1.png"/>
+          <p:cNvPr id="5" name="Picture 4" descr="td-dried-flowers-2-1.png"/>
           <p:cNvPicPr>
             <a:picLocks noChangeAspect="1"/>
           </p:cNvPicPr>
@@ -8464,170 +8039,86 @@
         </p:blipFill>
         <p:spPr>
           <a:xfrm>
-            <a:off x="5905500" y="1143000"/>
-            <a:ext cx="2857500" cy="4572000"/>
+            <a:off x="2571750" y="9067225"/>
+            <a:ext cx="1619250" cy="2439548"/>
           </a:xfrm>
           <a:prstGeom prst="rect">
             <a:avLst/>
           </a:prstGeom>
         </p:spPr>
       </p:pic>
-      <p:sp>
-        <p:nvSpPr>
-          <p:cNvPr id="5" name="TextBox 4"/>
-          <p:cNvSpPr txBox="1"/>
-          <p:nvPr/>
-        </p:nvSpPr>
-        <p:spPr>
-          <a:xfrm>
-            <a:off x="762000" y="6419850"/>
-            <a:ext cx="8763000" cy="838181"/>
-          </a:xfrm>
-          <a:prstGeom prst="rect">
-            <a:avLst/>
-          </a:prstGeom>
-          <a:noFill/>
-        </p:spPr>
-        <p:txBody>
-          <a:bodyPr wrap="square" lIns="0" rIns="0" tIns="0" bIns="0" anchor="t">
-            <a:spAutoFit/>
-          </a:bodyPr>
-          <a:lstStyle/>
-          <a:p>
-            <a:pPr algn="l">
-              <a:lnSpc>
-                <a:spcPct val="100000"/>
-              </a:lnSpc>
-            </a:pPr>
-            <a:r>
-              <a:rPr sz="5000" b="1" i="0">
-                <a:solidFill>
-                  <a:srgbClr val="31662F"/>
-                </a:solidFill>
-                <a:latin typeface="Montserrat"/>
-              </a:rPr>
-              <a:t>Aysen Ustunay</a:t>
-            </a:r>
-          </a:p>
-        </p:txBody>
-      </p:sp>
-      <p:sp>
-        <p:nvSpPr>
-          <p:cNvPr id="6" name="TextBox 5"/>
-          <p:cNvSpPr txBox="1"/>
-          <p:nvPr/>
-        </p:nvSpPr>
-        <p:spPr>
-          <a:xfrm>
-            <a:off x="762000" y="7219931"/>
-            <a:ext cx="8763000" cy="471173"/>
-          </a:xfrm>
-          <a:prstGeom prst="rect">
-            <a:avLst/>
-          </a:prstGeom>
-          <a:noFill/>
-        </p:spPr>
-        <p:txBody>
-          <a:bodyPr wrap="square" lIns="0" rIns="0" tIns="0" bIns="0" anchor="t">
-            <a:spAutoFit/>
-          </a:bodyPr>
-          <a:lstStyle/>
-          <a:p>
-            <a:pPr algn="l">
-              <a:lnSpc>
-                <a:spcPct val="115000"/>
-              </a:lnSpc>
-            </a:pPr>
-            <a:r>
-              <a:rPr sz="2200" b="0" i="0">
-                <a:solidFill>
-                  <a:srgbClr val="1A1A1A"/>
-                </a:solidFill>
-                <a:latin typeface="Source Sans 3"/>
-              </a:rPr>
-              <a:t>Advanced Programs Mentor</a:t>
-            </a:r>
-          </a:p>
-        </p:txBody>
-      </p:sp>
-      <p:sp>
-        <p:nvSpPr>
-          <p:cNvPr id="7" name="TextBox 6"/>
-          <p:cNvSpPr txBox="1"/>
-          <p:nvPr/>
-        </p:nvSpPr>
-        <p:spPr>
-          <a:xfrm>
-            <a:off x="762000" y="7843504"/>
-            <a:ext cx="8763000" cy="983795"/>
-          </a:xfrm>
-          <a:prstGeom prst="rect">
-            <a:avLst/>
-          </a:prstGeom>
-          <a:noFill/>
-        </p:spPr>
-        <p:txBody>
-          <a:bodyPr wrap="square" lIns="0" rIns="0" tIns="0" bIns="0" anchor="t">
-            <a:spAutoFit/>
-          </a:bodyPr>
-          <a:lstStyle/>
-          <a:p>
-            <a:pPr algn="l">
-              <a:lnSpc>
-                <a:spcPct val="115000"/>
-              </a:lnSpc>
-            </a:pPr>
-            <a:r>
-              <a:rPr sz="2600" b="0" i="0">
-                <a:solidFill>
-                  <a:srgbClr val="1A1A1A"/>
-                </a:solidFill>
-                <a:latin typeface="Source Sans 3"/>
-              </a:rPr>
-              <a:t>Favourite microbe: flagellates. She loves watching them as babies, running around.</a:t>
-            </a:r>
-          </a:p>
-        </p:txBody>
-      </p:sp>
-      <p:sp>
-        <p:nvSpPr>
-          <p:cNvPr id="8" name="TextBox 7"/>
-          <p:cNvSpPr txBox="1"/>
-          <p:nvPr/>
-        </p:nvSpPr>
-        <p:spPr>
-          <a:xfrm>
-            <a:off x="6667500" y="12192000"/>
-            <a:ext cx="2857500" cy="285750"/>
-          </a:xfrm>
-          <a:prstGeom prst="rect">
-            <a:avLst/>
-          </a:prstGeom>
-          <a:noFill/>
-        </p:spPr>
-        <p:txBody>
-          <a:bodyPr wrap="square" lIns="0" rIns="0" tIns="0" bIns="0" anchor="t">
-            <a:spAutoFit/>
-          </a:bodyPr>
-          <a:lstStyle/>
-          <a:p>
-            <a:pPr algn="r">
-              <a:lnSpc>
-                <a:spcPct val="120000"/>
-              </a:lnSpc>
-            </a:pPr>
-            <a:r>
-              <a:rPr sz="1800" b="1" i="0">
-                <a:solidFill>
-                  <a:srgbClr val="31662F"/>
-                </a:solidFill>
-                <a:latin typeface="Montserrat"/>
-              </a:rPr>
-              <a:t>soilfoodweb.com</a:t>
-            </a:r>
-          </a:p>
-        </p:txBody>
-      </p:sp>
+      <p:pic>
+        <p:nvPicPr>
+          <p:cNvPr id="6" name="Picture 5" descr="td-tithonia-flower-1.png"/>
+          <p:cNvPicPr>
+            <a:picLocks noChangeAspect="1"/>
+          </p:cNvPicPr>
+          <p:nvPr/>
+        </p:nvPicPr>
+        <p:blipFill>
+          <a:blip r:embed="rId5"/>
+          <a:stretch>
+            <a:fillRect/>
+          </a:stretch>
+        </p:blipFill>
+        <p:spPr>
+          <a:xfrm>
+            <a:off x="4444603" y="8858250"/>
+            <a:ext cx="1493043" cy="2857500"/>
+          </a:xfrm>
+          <a:prstGeom prst="rect">
+            <a:avLst/>
+          </a:prstGeom>
+        </p:spPr>
+      </p:pic>
+      <p:pic>
+        <p:nvPicPr>
+          <p:cNvPr id="7" name="Picture 6" descr="td-dried-flowers-1-1.png"/>
+          <p:cNvPicPr>
+            <a:picLocks noChangeAspect="1"/>
+          </p:cNvPicPr>
+          <p:nvPr/>
+        </p:nvPicPr>
+        <p:blipFill>
+          <a:blip r:embed="rId6"/>
+          <a:stretch>
+            <a:fillRect/>
+          </a:stretch>
+        </p:blipFill>
+        <p:spPr>
+          <a:xfrm>
+            <a:off x="6191250" y="9242322"/>
+            <a:ext cx="1619250" cy="2089354"/>
+          </a:xfrm>
+          <a:prstGeom prst="rect">
+            <a:avLst/>
+          </a:prstGeom>
+        </p:spPr>
+      </p:pic>
+      <p:pic>
+        <p:nvPicPr>
+          <p:cNvPr id="8" name="Picture 7" descr="foundation-logo-white.png"/>
+          <p:cNvPicPr>
+            <a:picLocks noChangeAspect="1"/>
+          </p:cNvPicPr>
+          <p:nvPr/>
+        </p:nvPicPr>
+        <p:blipFill>
+          <a:blip r:embed="rId7"/>
+          <a:stretch>
+            <a:fillRect/>
+          </a:stretch>
+        </p:blipFill>
+        <p:spPr>
+          <a:xfrm>
+            <a:off x="8477250" y="11250012"/>
+            <a:ext cx="1047750" cy="941987"/>
+          </a:xfrm>
+          <a:prstGeom prst="rect">
+            <a:avLst/>
+          </a:prstGeom>
+        </p:spPr>
+      </p:pic>
     </p:spTree>
   </p:cSld>
   <p:clrMapOvr>
